--- a/research-materials/slides/06_進捗報告④_20261218_本実験の結果速報.pptx
+++ b/research-materials/slides/06_進捗報告④_20261218_本実験の結果速報.pptx
@@ -153,6 +153,9 @@
                 <a:solidFill>
                   <a:srgbClr val="0B3C6E"/>
                 </a:solidFill>
+                <a:latin typeface="BIZ UDPゴシック"/>
+                <a:ea typeface="BIZ UDPゴシック"/>
+                <a:cs typeface="BIZ UDPゴシック"/>
               </a:rPr>
               <a:t>割付から6週完了までの継続率</a:t>
             </a:r>
@@ -258,6 +261,9 @@
                   <a:solidFill>
                     <a:srgbClr val="24303F"/>
                   </a:solidFill>
+                  <a:latin typeface="BIZ UDPゴシック"/>
+                  <a:ea typeface="BIZ UDPゴシック"/>
+                  <a:cs typeface="BIZ UDPゴシック"/>
                 </a:defRPr>
               </a:pPr>
             </a:p>
@@ -301,6 +307,9 @@
                 <a:solidFill>
                   <a:srgbClr val="24303F"/>
                 </a:solidFill>
+                <a:latin typeface="BIZ UDPゴシック"/>
+                <a:ea typeface="BIZ UDPゴシック"/>
+                <a:cs typeface="BIZ UDPゴシック"/>
               </a:defRPr>
             </a:pPr>
           </a:p>
@@ -347,6 +356,9 @@
                 <a:solidFill>
                   <a:srgbClr val="5A6676"/>
                 </a:solidFill>
+                <a:latin typeface="BIZ UDPゴシック"/>
+                <a:ea typeface="BIZ UDPゴシック"/>
+                <a:cs typeface="BIZ UDPゴシック"/>
               </a:defRPr>
             </a:pPr>
           </a:p>
@@ -367,9 +379,16 @@
           <a:solidFill>
             <a:srgbClr val="5A6676"/>
           </a:solidFill>
+          <a:latin typeface="BIZ UDPゴシック"/>
+          <a:ea typeface="BIZ UDPゴシック"/>
+          <a:cs typeface="BIZ UDPゴシック"/>
         </a:defRPr>
       </a:pPr>
-      <a:endParaRPr lang="en-US"/>
+      <a:endParaRPr lang="en-US">
+        <a:latin typeface="BIZ UDPゴシック"/>
+        <a:ea typeface="BIZ UDPゴシック"/>
+        <a:cs typeface="BIZ UDPゴシック"/>
+      </a:endParaRPr>
     </a:p>
   </c:txPr>
   <c:externalData r:id="rId1">
@@ -393,6 +412,9 @@
                 <a:solidFill>
                   <a:srgbClr val="0B3C6E"/>
                 </a:solidFill>
+                <a:latin typeface="BIZ UDPゴシック"/>
+                <a:ea typeface="BIZ UDPゴシック"/>
+                <a:cs typeface="BIZ UDPゴシック"/>
               </a:rPr>
               <a:t>WHO-5 の平均（素点 0〜25）</a:t>
             </a:r>
@@ -456,6 +478,9 @@
                       <a:solidFill>
                         <a:srgbClr val="8FA3B8"/>
                       </a:solidFill>
+                      <a:latin typeface="BIZ UDPゴシック"/>
+                      <a:ea typeface="BIZ UDPゴシック"/>
+                      <a:cs typeface="BIZ UDPゴシック"/>
                     </a:defRPr>
                   </a:pPr>
                 </a:p>
@@ -568,6 +593,9 @@
                       <a:solidFill>
                         <a:srgbClr val="0099FF"/>
                       </a:solidFill>
+                      <a:latin typeface="BIZ UDPゴシック"/>
+                      <a:ea typeface="BIZ UDPゴシック"/>
+                      <a:cs typeface="BIZ UDPゴシック"/>
                     </a:defRPr>
                   </a:pPr>
                 </a:p>
@@ -680,6 +708,9 @@
                       <a:solidFill>
                         <a:srgbClr val="12A38A"/>
                       </a:solidFill>
+                      <a:latin typeface="BIZ UDPゴシック"/>
+                      <a:ea typeface="BIZ UDPゴシック"/>
+                      <a:cs typeface="BIZ UDPゴシック"/>
                     </a:defRPr>
                   </a:pPr>
                 </a:p>
@@ -774,6 +805,9 @@
                 <a:solidFill>
                   <a:srgbClr val="24303F"/>
                 </a:solidFill>
+                <a:latin typeface="BIZ UDPゴシック"/>
+                <a:ea typeface="BIZ UDPゴシック"/>
+                <a:cs typeface="BIZ UDPゴシック"/>
               </a:defRPr>
             </a:pPr>
           </a:p>
@@ -820,6 +854,9 @@
                 <a:solidFill>
                   <a:srgbClr val="5A6676"/>
                 </a:solidFill>
+                <a:latin typeface="BIZ UDPゴシック"/>
+                <a:ea typeface="BIZ UDPゴシック"/>
+                <a:cs typeface="BIZ UDPゴシック"/>
               </a:defRPr>
             </a:pPr>
           </a:p>
@@ -838,7 +875,11 @@
         <a:lstStyle/>
         <a:p>
           <a:pPr>
-            <a:defRPr sz="1100"/>
+            <a:defRPr sz="1100">
+              <a:latin typeface="BIZ UDPゴシック"/>
+              <a:ea typeface="BIZ UDPゴシック"/>
+              <a:cs typeface="BIZ UDPゴシック"/>
+            </a:defRPr>
           </a:pPr>
         </a:p>
       </c:txPr>
@@ -856,9 +897,16 @@
           <a:solidFill>
             <a:srgbClr val="5A6676"/>
           </a:solidFill>
+          <a:latin typeface="BIZ UDPゴシック"/>
+          <a:ea typeface="BIZ UDPゴシック"/>
+          <a:cs typeface="BIZ UDPゴシック"/>
         </a:defRPr>
       </a:pPr>
-      <a:endParaRPr lang="en-US"/>
+      <a:endParaRPr lang="en-US">
+        <a:latin typeface="BIZ UDPゴシック"/>
+        <a:ea typeface="BIZ UDPゴシック"/>
+        <a:cs typeface="BIZ UDPゴシック"/>
+      </a:endParaRPr>
     </a:p>
   </c:txPr>
   <c:externalData r:id="rId1">
@@ -882,6 +930,9 @@
                 <a:solidFill>
                   <a:srgbClr val="0B3C6E"/>
                 </a:solidFill>
+                <a:latin typeface="BIZ UDPゴシック"/>
+                <a:ea typeface="BIZ UDPゴシック"/>
+                <a:cs typeface="BIZ UDPゴシック"/>
               </a:rPr>
               <a:t>週ごとの実行率（%）</a:t>
             </a:r>
@@ -942,6 +993,9 @@
                     <a:solidFill>
                       <a:srgbClr val="0099FF"/>
                     </a:solidFill>
+                    <a:latin typeface="BIZ UDPゴシック"/>
+                    <a:ea typeface="BIZ UDPゴシック"/>
+                    <a:cs typeface="BIZ UDPゴシック"/>
                   </a:defRPr>
                 </a:pPr>
               </a:p>
@@ -1044,6 +1098,9 @@
                     <a:solidFill>
                       <a:srgbClr val="12A38A"/>
                     </a:solidFill>
+                    <a:latin typeface="BIZ UDPゴシック"/>
+                    <a:ea typeface="BIZ UDPゴシック"/>
+                    <a:cs typeface="BIZ UDPゴシック"/>
                   </a:defRPr>
                 </a:pPr>
               </a:p>
@@ -1131,6 +1188,9 @@
                 <a:solidFill>
                   <a:srgbClr val="24303F"/>
                 </a:solidFill>
+                <a:latin typeface="BIZ UDPゴシック"/>
+                <a:ea typeface="BIZ UDPゴシック"/>
+                <a:cs typeface="BIZ UDPゴシック"/>
               </a:defRPr>
             </a:pPr>
           </a:p>
@@ -1177,6 +1237,9 @@
                 <a:solidFill>
                   <a:srgbClr val="5A6676"/>
                 </a:solidFill>
+                <a:latin typeface="BIZ UDPゴシック"/>
+                <a:ea typeface="BIZ UDPゴシック"/>
+                <a:cs typeface="BIZ UDPゴシック"/>
               </a:defRPr>
             </a:pPr>
           </a:p>
@@ -1195,7 +1258,11 @@
         <a:lstStyle/>
         <a:p>
           <a:pPr>
-            <a:defRPr sz="1100"/>
+            <a:defRPr sz="1100">
+              <a:latin typeface="BIZ UDPゴシック"/>
+              <a:ea typeface="BIZ UDPゴシック"/>
+              <a:cs typeface="BIZ UDPゴシック"/>
+            </a:defRPr>
           </a:pPr>
         </a:p>
       </c:txPr>
@@ -1213,9 +1280,16 @@
           <a:solidFill>
             <a:srgbClr val="5A6676"/>
           </a:solidFill>
+          <a:latin typeface="BIZ UDPゴシック"/>
+          <a:ea typeface="BIZ UDPゴシック"/>
+          <a:cs typeface="BIZ UDPゴシック"/>
         </a:defRPr>
       </a:pPr>
-      <a:endParaRPr lang="en-US"/>
+      <a:endParaRPr lang="en-US">
+        <a:latin typeface="BIZ UDPゴシック"/>
+        <a:ea typeface="BIZ UDPゴシック"/>
+        <a:cs typeface="BIZ UDPゴシック"/>
+      </a:endParaRPr>
     </a:p>
   </c:txPr>
   <c:externalData r:id="rId1">
@@ -1239,6 +1313,9 @@
                 <a:solidFill>
                   <a:srgbClr val="0B3C6E"/>
                 </a:solidFill>
+                <a:latin typeface="BIZ UDPゴシック"/>
+                <a:ea typeface="BIZ UDPゴシック"/>
+                <a:cs typeface="BIZ UDPゴシック"/>
               </a:rPr>
               <a:t>6週時点の平均絶対誤差（5段階）</a:t>
             </a:r>
@@ -1364,6 +1441,9 @@
                   <a:solidFill>
                     <a:srgbClr val="24303F"/>
                   </a:solidFill>
+                  <a:latin typeface="BIZ UDPゴシック"/>
+                  <a:ea typeface="BIZ UDPゴシック"/>
+                  <a:cs typeface="BIZ UDPゴシック"/>
                 </a:defRPr>
               </a:pPr>
             </a:p>
@@ -1408,6 +1488,9 @@
                 <a:solidFill>
                   <a:srgbClr val="24303F"/>
                 </a:solidFill>
+                <a:latin typeface="BIZ UDPゴシック"/>
+                <a:ea typeface="BIZ UDPゴシック"/>
+                <a:cs typeface="BIZ UDPゴシック"/>
               </a:defRPr>
             </a:pPr>
           </a:p>
@@ -1454,6 +1537,9 @@
                 <a:solidFill>
                   <a:srgbClr val="5A6676"/>
                 </a:solidFill>
+                <a:latin typeface="BIZ UDPゴシック"/>
+                <a:ea typeface="BIZ UDPゴシック"/>
+                <a:cs typeface="BIZ UDPゴシック"/>
               </a:defRPr>
             </a:pPr>
           </a:p>
@@ -1471,7 +1557,11 @@
         <a:lstStyle/>
         <a:p>
           <a:pPr>
-            <a:defRPr sz="1100"/>
+            <a:defRPr sz="1100">
+              <a:latin typeface="BIZ UDPゴシック"/>
+              <a:ea typeface="BIZ UDPゴシック"/>
+              <a:cs typeface="BIZ UDPゴシック"/>
+            </a:defRPr>
           </a:pPr>
         </a:p>
       </c:txPr>
@@ -1487,9 +1577,16 @@
           <a:solidFill>
             <a:srgbClr val="5A6676"/>
           </a:solidFill>
+          <a:latin typeface="BIZ UDPゴシック"/>
+          <a:ea typeface="BIZ UDPゴシック"/>
+          <a:cs typeface="BIZ UDPゴシック"/>
         </a:defRPr>
       </a:pPr>
-      <a:endParaRPr lang="en-US"/>
+      <a:endParaRPr lang="en-US">
+        <a:latin typeface="BIZ UDPゴシック"/>
+        <a:ea typeface="BIZ UDPゴシック"/>
+        <a:cs typeface="BIZ UDPゴシック"/>
+      </a:endParaRPr>
     </a:p>
   </c:txPr>
   <c:externalData r:id="rId1">
@@ -1513,6 +1610,9 @@
                 <a:solidFill>
                   <a:srgbClr val="0B3C6E"/>
                 </a:solidFill>
+                <a:latin typeface="BIZ UDPゴシック"/>
+                <a:ea typeface="BIZ UDPゴシック"/>
+                <a:cs typeface="BIZ UDPゴシック"/>
               </a:rPr>
               <a:t>2週 → 6週の変化（マイナス＝疲れが減った）</a:t>
             </a:r>
@@ -1744,6 +1844,9 @@
                 <a:solidFill>
                   <a:srgbClr val="24303F"/>
                 </a:solidFill>
+                <a:latin typeface="BIZ UDPゴシック"/>
+                <a:ea typeface="BIZ UDPゴシック"/>
+                <a:cs typeface="BIZ UDPゴシック"/>
               </a:defRPr>
             </a:pPr>
           </a:p>
@@ -1790,6 +1893,9 @@
                 <a:solidFill>
                   <a:srgbClr val="5A6676"/>
                 </a:solidFill>
+                <a:latin typeface="BIZ UDPゴシック"/>
+                <a:ea typeface="BIZ UDPゴシック"/>
+                <a:cs typeface="BIZ UDPゴシック"/>
               </a:defRPr>
             </a:pPr>
           </a:p>
@@ -1807,7 +1913,11 @@
         <a:lstStyle/>
         <a:p>
           <a:pPr>
-            <a:defRPr sz="1100"/>
+            <a:defRPr sz="1100">
+              <a:latin typeface="BIZ UDPゴシック"/>
+              <a:ea typeface="BIZ UDPゴシック"/>
+              <a:cs typeface="BIZ UDPゴシック"/>
+            </a:defRPr>
           </a:pPr>
         </a:p>
       </c:txPr>
@@ -1823,9 +1933,16 @@
           <a:solidFill>
             <a:srgbClr val="5A6676"/>
           </a:solidFill>
+          <a:latin typeface="BIZ UDPゴシック"/>
+          <a:ea typeface="BIZ UDPゴシック"/>
+          <a:cs typeface="BIZ UDPゴシック"/>
         </a:defRPr>
       </a:pPr>
-      <a:endParaRPr lang="en-US"/>
+      <a:endParaRPr lang="en-US">
+        <a:latin typeface="BIZ UDPゴシック"/>
+        <a:ea typeface="BIZ UDPゴシック"/>
+        <a:cs typeface="BIZ UDPゴシック"/>
+      </a:endParaRPr>
     </a:p>
   </c:txPr>
   <c:externalData r:id="rId1">
@@ -1849,6 +1966,9 @@
                 <a:solidFill>
                   <a:srgbClr val="0B3C6E"/>
                 </a:solidFill>
+                <a:latin typeface="BIZ UDPゴシック"/>
+                <a:ea typeface="BIZ UDPゴシック"/>
+                <a:cs typeface="BIZ UDPゴシック"/>
               </a:rPr>
               <a:t>週ごとの記録率（%）</a:t>
             </a:r>
@@ -1912,6 +2032,9 @@
                       <a:solidFill>
                         <a:srgbClr val="8FA3B8"/>
                       </a:solidFill>
+                      <a:latin typeface="BIZ UDPゴシック"/>
+                      <a:ea typeface="BIZ UDPゴシック"/>
+                      <a:cs typeface="BIZ UDPゴシック"/>
                     </a:defRPr>
                   </a:pPr>
                 </a:p>
@@ -2036,6 +2159,9 @@
                       <a:solidFill>
                         <a:srgbClr val="0099FF"/>
                       </a:solidFill>
+                      <a:latin typeface="BIZ UDPゴシック"/>
+                      <a:ea typeface="BIZ UDPゴシック"/>
+                      <a:cs typeface="BIZ UDPゴシック"/>
                     </a:defRPr>
                   </a:pPr>
                 </a:p>
@@ -2160,6 +2286,9 @@
                       <a:solidFill>
                         <a:srgbClr val="12A38A"/>
                       </a:solidFill>
+                      <a:latin typeface="BIZ UDPゴシック"/>
+                      <a:ea typeface="BIZ UDPゴシック"/>
+                      <a:cs typeface="BIZ UDPゴシック"/>
                     </a:defRPr>
                   </a:pPr>
                 </a:p>
@@ -2266,6 +2395,9 @@
                 <a:solidFill>
                   <a:srgbClr val="24303F"/>
                 </a:solidFill>
+                <a:latin typeface="BIZ UDPゴシック"/>
+                <a:ea typeface="BIZ UDPゴシック"/>
+                <a:cs typeface="BIZ UDPゴシック"/>
               </a:defRPr>
             </a:pPr>
           </a:p>
@@ -2312,6 +2444,9 @@
                 <a:solidFill>
                   <a:srgbClr val="5A6676"/>
                 </a:solidFill>
+                <a:latin typeface="BIZ UDPゴシック"/>
+                <a:ea typeface="BIZ UDPゴシック"/>
+                <a:cs typeface="BIZ UDPゴシック"/>
               </a:defRPr>
             </a:pPr>
           </a:p>
@@ -2330,7 +2465,11 @@
         <a:lstStyle/>
         <a:p>
           <a:pPr>
-            <a:defRPr sz="1100"/>
+            <a:defRPr sz="1100">
+              <a:latin typeface="BIZ UDPゴシック"/>
+              <a:ea typeface="BIZ UDPゴシック"/>
+              <a:cs typeface="BIZ UDPゴシック"/>
+            </a:defRPr>
           </a:pPr>
         </a:p>
       </c:txPr>
@@ -2348,9 +2487,16 @@
           <a:solidFill>
             <a:srgbClr val="5A6676"/>
           </a:solidFill>
+          <a:latin typeface="BIZ UDPゴシック"/>
+          <a:ea typeface="BIZ UDPゴシック"/>
+          <a:cs typeface="BIZ UDPゴシック"/>
         </a:defRPr>
       </a:pPr>
-      <a:endParaRPr lang="en-US"/>
+      <a:endParaRPr lang="en-US">
+        <a:latin typeface="BIZ UDPゴシック"/>
+        <a:ea typeface="BIZ UDPゴシック"/>
+        <a:cs typeface="BIZ UDPゴシック"/>
+      </a:endParaRPr>
     </a:p>
   </c:txPr>
   <c:externalData r:id="rId1">
@@ -6327,7 +6473,7 @@
         <p:spPr>
           <a:xfrm>
             <a:off x="0" y="855796"/>
-            <a:ext cx="5115503" cy="300082"/>
+            <a:ext cx="6200000" cy="300082"/>
           </a:xfrm>
           <a:prstGeom prst="rect">
             <a:avLst/>
@@ -6780,6 +6926,9 @@
                 <a:solidFill>
                   <a:srgbClr val="24303F"/>
                 </a:solidFill>
+                <a:latin typeface="BIZ UDPゴシック"/>
+                <a:ea typeface="BIZ UDPゴシック"/>
+                <a:cs typeface="BIZ UDPゴシック"/>
               </a:rPr>
               <a:t>進捗報告 2026/12/18</a:t>
             </a:r>
@@ -6814,6 +6963,9 @@
                 <a:solidFill>
                   <a:srgbClr val="24303F"/>
                 </a:solidFill>
+                <a:latin typeface="BIZ UDPゴシック"/>
+                <a:ea typeface="BIZ UDPゴシック"/>
+                <a:cs typeface="BIZ UDPゴシック"/>
               </a:rPr>
               <a:t>今井元</a:t>
             </a:r>
@@ -6855,6 +7007,9 @@
                 <a:solidFill>
                   <a:srgbClr val="24303F"/>
                 </a:solidFill>
+                <a:latin typeface="BIZ UDPゴシック"/>
+                <a:ea typeface="BIZ UDPゴシック"/>
+                <a:cs typeface="BIZ UDPゴシック"/>
               </a:rPr>
               <a:t>メディアインタラクション研究室　進捗報告</a:t>
             </a:r>
@@ -6894,6 +7049,9 @@
                 <a:solidFill>
                   <a:srgbClr val="24303F"/>
                 </a:solidFill>
+                <a:latin typeface="BIZ UDPゴシック"/>
+                <a:ea typeface="BIZ UDPゴシック"/>
+                <a:cs typeface="BIZ UDPゴシック"/>
               </a:rPr>
               <a:t>大阪工業大学</a:t>
             </a:r>
@@ -6910,6 +7068,9 @@
                 <a:solidFill>
                   <a:srgbClr val="24303F"/>
                 </a:solidFill>
+                <a:latin typeface="BIZ UDPゴシック"/>
+                <a:ea typeface="BIZ UDPゴシック"/>
+                <a:cs typeface="BIZ UDPゴシック"/>
               </a:rPr>
               <a:t>メディアインタラクション研究室</a:t>
             </a:r>
@@ -6952,6 +7113,9 @@
                 <a:solidFill>
                   <a:srgbClr val="FFFFFF"/>
                 </a:solidFill>
+                <a:latin typeface="BIZ UDPゴシック"/>
+                <a:ea typeface="BIZ UDPゴシック"/>
+                <a:cs typeface="BIZ UDPゴシック"/>
               </a:rPr>
               <a:t>本実験が完了</a:t>
             </a:r>
@@ -6971,6 +7135,9 @@
                 <a:solidFill>
                   <a:srgbClr val="FFFFFF"/>
                 </a:solidFill>
+                <a:latin typeface="BIZ UDPゴシック"/>
+                <a:ea typeface="BIZ UDPゴシック"/>
+                <a:cs typeface="BIZ UDPゴシック"/>
               </a:rPr>
               <a:t>RQ1〜3 の主要な結果（速報）</a:t>
             </a:r>
@@ -6990,6 +7157,9 @@
                 <a:solidFill>
                   <a:srgbClr val="FFFFFF"/>
                 </a:solidFill>
+                <a:latin typeface="BIZ UDPゴシック"/>
+                <a:ea typeface="BIZ UDPゴシック"/>
+                <a:cs typeface="BIZ UDPゴシック"/>
               </a:rPr>
               <a:t>修士論文の章立てと執筆スケジュール</a:t>
             </a:r>
@@ -7066,6 +7236,9 @@
                 <a:solidFill>
                   <a:srgbClr val="24303F"/>
                 </a:solidFill>
+                <a:latin typeface="BIZ UDPゴシック"/>
+                <a:ea typeface="BIZ UDPゴシック"/>
+                <a:cs typeface="BIZ UDPゴシック"/>
               </a:rPr>
               <a:t>自由記述から</a:t>
             </a:r>
@@ -7084,9 +7257,14 @@
         </p:nvSpPr>
         <p:spPr/>
         <p:txBody>
-          <a:bodyPr/>
-          <a:p>
-            <a:r>
+          <a:bodyPr lIns="27432" rIns="0" wrap="none"/>
+          <a:p>
+            <a:r>
+              <a:rPr sz="900">
+                <a:latin typeface="BIZ UDPゴシック"/>
+                <a:ea typeface="BIZ UDPゴシック"/>
+                <a:cs typeface="BIZ UDPゴシック"/>
+              </a:rPr>
               <a:t>2026/12/18</a:t>
             </a:r>
           </a:p>
@@ -7107,7 +7285,11 @@
           <a:bodyPr/>
           <a:p>
             <a:fld id="{B6F15528-21DE-4FAA-801E-634DDDAF4B2B}" type="slidenum">
-              <a:rPr lang="en-US"/>
+              <a:rPr lang="en-US">
+                <a:latin typeface="BIZ UDPゴシック"/>
+                <a:ea typeface="BIZ UDPゴシック"/>
+                <a:cs typeface="BIZ UDPゴシック"/>
+              </a:rPr>
               <a:t>10</a:t>
             </a:fld>
           </a:p>
@@ -7212,6 +7394,9 @@
                 <a:solidFill>
                   <a:srgbClr val="FFFFFF"/>
                 </a:solidFill>
+                <a:latin typeface="BIZ UDPゴシック"/>
+                <a:ea typeface="BIZ UDPゴシック"/>
+                <a:cs typeface="BIZ UDPゴシック"/>
               </a:rPr>
               <a:t>群C</a:t>
             </a:r>
@@ -7251,6 +7436,9 @@
                 <a:solidFill>
                   <a:srgbClr val="24303F"/>
                 </a:solidFill>
+                <a:latin typeface="BIZ UDPゴシック"/>
+                <a:ea typeface="BIZ UDPゴシック"/>
+                <a:cs typeface="BIZ UDPゴシック"/>
               </a:rPr>
               <a:t>「ぼやけていた自分がだんだんはっきりしてくるのが楽しみで、記録を続けられた」</a:t>
             </a:r>
@@ -7356,6 +7544,9 @@
                 <a:solidFill>
                   <a:srgbClr val="FFFFFF"/>
                 </a:solidFill>
+                <a:latin typeface="BIZ UDPゴシック"/>
+                <a:ea typeface="BIZ UDPゴシック"/>
+                <a:cs typeface="BIZ UDPゴシック"/>
               </a:rPr>
               <a:t>群B</a:t>
             </a:r>
@@ -7395,6 +7586,9 @@
                 <a:solidFill>
                   <a:srgbClr val="24303F"/>
                 </a:solidFill>
+                <a:latin typeface="BIZ UDPゴシック"/>
+                <a:ea typeface="BIZ UDPゴシック"/>
+                <a:cs typeface="BIZ UDPゴシック"/>
               </a:rPr>
               <a:t>「「推しを減らせ」と言われないのがよかった。グッズの買い方だけ変えた」</a:t>
             </a:r>
@@ -7500,6 +7694,9 @@
                 <a:solidFill>
                   <a:srgbClr val="FFFFFF"/>
                 </a:solidFill>
+                <a:latin typeface="BIZ UDPゴシック"/>
+                <a:ea typeface="BIZ UDPゴシック"/>
+                <a:cs typeface="BIZ UDPゴシック"/>
               </a:rPr>
               <a:t>群C</a:t>
             </a:r>
@@ -7539,6 +7736,9 @@
                 <a:solidFill>
                   <a:srgbClr val="24303F"/>
                 </a:solidFill>
+                <a:latin typeface="BIZ UDPゴシック"/>
+                <a:ea typeface="BIZ UDPゴシック"/>
+                <a:cs typeface="BIZ UDPゴシック"/>
               </a:rPr>
               <a:t>「「今のまま」の自分の顔を見て、夜中まで配信を見るのをやめようと思った」</a:t>
             </a:r>
@@ -7644,6 +7844,9 @@
                 <a:solidFill>
                   <a:srgbClr val="FFFFFF"/>
                 </a:solidFill>
+                <a:latin typeface="BIZ UDPゴシック"/>
+                <a:ea typeface="BIZ UDPゴシック"/>
+                <a:cs typeface="BIZ UDPゴシック"/>
               </a:rPr>
               <a:t>群C</a:t>
             </a:r>
@@ -7683,6 +7886,9 @@
                 <a:solidFill>
                   <a:srgbClr val="24303F"/>
                 </a:solidFill>
+                <a:latin typeface="BIZ UDPゴシック"/>
+                <a:ea typeface="BIZ UDPゴシック"/>
+                <a:cs typeface="BIZ UDPゴシック"/>
               </a:rPr>
               <a:t>「予測が2週続けて外れて、少し信用できなくなった」</a:t>
             </a:r>
@@ -7832,6 +8038,9 @@
                 <a:solidFill>
                   <a:srgbClr val="0B3C6E"/>
                 </a:solidFill>
+                <a:latin typeface="BIZ UDPゴシック"/>
+                <a:ea typeface="BIZ UDPゴシック"/>
+                <a:cs typeface="BIZ UDPゴシック"/>
               </a:rPr>
               <a:t>「減らせと言われない」安心感と、「未来がくっきりする」楽しさが続ける理由に</a:t>
             </a:r>
@@ -7848,6 +8057,9 @@
                 <a:solidFill>
                   <a:srgbClr val="24303F"/>
                 </a:solidFill>
+                <a:latin typeface="BIZ UDPゴシック"/>
+                <a:ea typeface="BIZ UDPゴシック"/>
+                <a:cs typeface="BIZ UDPゴシック"/>
               </a:rPr>
               <a:t>一方で、予測が外れ続けると信頼が下がる → 答え合わせの見せ方は今後の課題</a:t>
             </a:r>
@@ -7911,6 +8123,9 @@
                 <a:solidFill>
                   <a:srgbClr val="E8457C"/>
                 </a:solidFill>
+                <a:latin typeface="BIZ UDPゴシック"/>
+                <a:ea typeface="BIZ UDPゴシック"/>
+                <a:cs typeface="BIZ UDPゴシック"/>
               </a:rPr>
               <a:t>※ 記述は想定例</a:t>
             </a:r>
@@ -7963,6 +8178,9 @@
                 <a:solidFill>
                   <a:srgbClr val="24303F"/>
                 </a:solidFill>
+                <a:latin typeface="BIZ UDPゴシック"/>
+                <a:ea typeface="BIZ UDPゴシック"/>
+                <a:cs typeface="BIZ UDPゴシック"/>
               </a:rPr>
               <a:t>考察（暫定）</a:t>
             </a:r>
@@ -7981,9 +8199,14 @@
         </p:nvSpPr>
         <p:spPr/>
         <p:txBody>
-          <a:bodyPr/>
-          <a:p>
-            <a:r>
+          <a:bodyPr lIns="27432" rIns="0" wrap="none"/>
+          <a:p>
+            <a:r>
+              <a:rPr sz="900">
+                <a:latin typeface="BIZ UDPゴシック"/>
+                <a:ea typeface="BIZ UDPゴシック"/>
+                <a:cs typeface="BIZ UDPゴシック"/>
+              </a:rPr>
               <a:t>2026/12/18</a:t>
             </a:r>
           </a:p>
@@ -8004,7 +8227,11 @@
           <a:bodyPr/>
           <a:p>
             <a:fld id="{B6F15528-21DE-4FAA-801E-634DDDAF4B2B}" type="slidenum">
-              <a:rPr lang="en-US"/>
+              <a:rPr lang="en-US">
+                <a:latin typeface="BIZ UDPゴシック"/>
+                <a:ea typeface="BIZ UDPゴシック"/>
+                <a:cs typeface="BIZ UDPゴシック"/>
+              </a:rPr>
               <a:t>11</a:t>
             </a:fld>
           </a:p>
@@ -8161,6 +8388,9 @@
                 <a:solidFill>
                   <a:srgbClr val="0B3C6E"/>
                 </a:solidFill>
+                <a:latin typeface="BIZ UDPゴシック"/>
+                <a:ea typeface="BIZ UDPゴシック"/>
+                <a:cs typeface="BIZ UDPゴシック"/>
               </a:rPr>
               <a:t>見せ方で行動は変わる（RQ2）</a:t>
             </a:r>
@@ -8177,6 +8407,9 @@
                 <a:solidFill>
                   <a:srgbClr val="24303F"/>
                 </a:solidFill>
+                <a:latin typeface="BIZ UDPゴシック"/>
+                <a:ea typeface="BIZ UDPゴシック"/>
+                <a:cs typeface="BIZ UDPゴシック"/>
               </a:rPr>
               <a:t>同じ提案でも、自分に似たアバターで将来の見込みを見ると実行が増えた</a:t>
             </a:r>
@@ -8334,6 +8567,9 @@
                 <a:solidFill>
                   <a:srgbClr val="0B3C6E"/>
                 </a:solidFill>
+                <a:latin typeface="BIZ UDPゴシック"/>
+                <a:ea typeface="BIZ UDPゴシック"/>
+                <a:cs typeface="BIZ UDPゴシック"/>
               </a:rPr>
               <a:t>幸福度への効果は小さい（RQ3）</a:t>
             </a:r>
@@ -8350,6 +8586,9 @@
                 <a:solidFill>
                   <a:srgbClr val="24303F"/>
                 </a:solidFill>
+                <a:latin typeface="BIZ UDPゴシック"/>
+                <a:ea typeface="BIZ UDPゴシック"/>
+                <a:cs typeface="BIZ UDPゴシック"/>
               </a:rPr>
               <a:t>6週間は習慣が定着する前（Lally et al., 2010：中央値66日）。効果が出るには期間が短い可能性</a:t>
             </a:r>
@@ -8507,6 +8746,9 @@
                 <a:solidFill>
                   <a:srgbClr val="0B3C6E"/>
                 </a:solidFill>
+                <a:latin typeface="BIZ UDPゴシック"/>
+                <a:ea typeface="BIZ UDPゴシック"/>
+                <a:cs typeface="BIZ UDPゴシック"/>
               </a:rPr>
               <a:t>不確かさを見せても不安は増えない</a:t>
             </a:r>
@@ -8523,6 +8765,9 @@
                 <a:solidFill>
                   <a:srgbClr val="24303F"/>
                 </a:solidFill>
+                <a:latin typeface="BIZ UDPゴシック"/>
+                <a:ea typeface="BIZ UDPゴシック"/>
+                <a:cs typeface="BIZ UDPゴシック"/>
               </a:rPr>
               <a:t>区間がおおむね正直で、不安も群Bと同程度。「ゆらぎ」は安全に使える見込み</a:t>
             </a:r>
@@ -8584,6 +8829,9 @@
                 <a:solidFill>
                   <a:srgbClr val="E8457C"/>
                 </a:solidFill>
+                <a:latin typeface="BIZ UDPゴシック"/>
+                <a:ea typeface="BIZ UDPゴシック"/>
+                <a:cs typeface="BIZ UDPゴシック"/>
               </a:rPr>
               <a:t>注意：実行した人ほど WHO-5 が高いかは、実行を本人が選ぶため偏りがある。主な結論は無作為割付の比較から導く</a:t>
             </a:r>
@@ -8636,6 +8884,9 @@
                 <a:solidFill>
                   <a:srgbClr val="24303F"/>
                 </a:solidFill>
+                <a:latin typeface="BIZ UDPゴシック"/>
+                <a:ea typeface="BIZ UDPゴシック"/>
+                <a:cs typeface="BIZ UDPゴシック"/>
               </a:rPr>
               <a:t>修士論文の章立てと執筆スケジュール</a:t>
             </a:r>
@@ -8654,9 +8905,14 @@
         </p:nvSpPr>
         <p:spPr/>
         <p:txBody>
-          <a:bodyPr/>
-          <a:p>
-            <a:r>
+          <a:bodyPr lIns="27432" rIns="0" wrap="none"/>
+          <a:p>
+            <a:r>
+              <a:rPr sz="900">
+                <a:latin typeface="BIZ UDPゴシック"/>
+                <a:ea typeface="BIZ UDPゴシック"/>
+                <a:cs typeface="BIZ UDPゴシック"/>
+              </a:rPr>
               <a:t>2026/12/18</a:t>
             </a:r>
           </a:p>
@@ -8677,7 +8933,11 @@
           <a:bodyPr/>
           <a:p>
             <a:fld id="{B6F15528-21DE-4FAA-801E-634DDDAF4B2B}" type="slidenum">
-              <a:rPr lang="en-US"/>
+              <a:rPr lang="en-US">
+                <a:latin typeface="BIZ UDPゴシック"/>
+                <a:ea typeface="BIZ UDPゴシック"/>
+                <a:cs typeface="BIZ UDPゴシック"/>
+              </a:rPr>
               <a:t>12</a:t>
             </a:fld>
           </a:p>
@@ -8725,6 +8985,9 @@
                           <a:solidFill>
                             <a:srgbClr val="FFFFFF"/>
                           </a:solidFill>
+                          <a:latin typeface="BIZ UDPゴシック"/>
+                          <a:ea typeface="BIZ UDPゴシック"/>
+                          <a:cs typeface="BIZ UDPゴシック"/>
                         </a:rPr>
                         <a:t>章</a:t>
                       </a:r>
@@ -8774,6 +9037,9 @@
                           <a:solidFill>
                             <a:srgbClr val="FFFFFF"/>
                           </a:solidFill>
+                          <a:latin typeface="BIZ UDPゴシック"/>
+                          <a:ea typeface="BIZ UDPゴシック"/>
+                          <a:cs typeface="BIZ UDPゴシック"/>
                         </a:rPr>
                         <a:t>内容</a:t>
                       </a:r>
@@ -8823,6 +9089,9 @@
                           <a:solidFill>
                             <a:srgbClr val="FFFFFF"/>
                           </a:solidFill>
+                          <a:latin typeface="BIZ UDPゴシック"/>
+                          <a:ea typeface="BIZ UDPゴシック"/>
+                          <a:cs typeface="BIZ UDPゴシック"/>
                         </a:rPr>
                         <a:t>執筆期間</a:t>
                       </a:r>
@@ -8874,6 +9143,9 @@
                           <a:solidFill>
                             <a:srgbClr val="24303F"/>
                           </a:solidFill>
+                          <a:latin typeface="BIZ UDPゴシック"/>
+                          <a:ea typeface="BIZ UDPゴシック"/>
+                          <a:cs typeface="BIZ UDPゴシック"/>
                         </a:rPr>
                         <a:t>1章 序論</a:t>
                       </a:r>
@@ -8923,6 +9195,9 @@
                           <a:solidFill>
                             <a:srgbClr val="24303F"/>
                           </a:solidFill>
+                          <a:latin typeface="BIZ UDPゴシック"/>
+                          <a:ea typeface="BIZ UDPゴシック"/>
+                          <a:cs typeface="BIZ UDPゴシック"/>
                         </a:rPr>
                         <a:t>背景・目的・RQ</a:t>
                       </a:r>
@@ -8972,6 +9247,9 @@
                           <a:solidFill>
                             <a:srgbClr val="24303F"/>
                           </a:solidFill>
+                          <a:latin typeface="BIZ UDPゴシック"/>
+                          <a:ea typeface="BIZ UDPゴシック"/>
+                          <a:cs typeface="BIZ UDPゴシック"/>
                         </a:rPr>
                         <a:t>12/21–12/25</a:t>
                       </a:r>
@@ -9023,6 +9301,9 @@
                           <a:solidFill>
                             <a:srgbClr val="24303F"/>
                           </a:solidFill>
+                          <a:latin typeface="BIZ UDPゴシック"/>
+                          <a:ea typeface="BIZ UDPゴシック"/>
+                          <a:cs typeface="BIZ UDPゴシック"/>
                         </a:rPr>
                         <a:t>2章 関連研究</a:t>
                       </a:r>
@@ -9072,6 +9353,9 @@
                           <a:solidFill>
                             <a:srgbClr val="24303F"/>
                           </a:solidFill>
+                          <a:latin typeface="BIZ UDPゴシック"/>
+                          <a:ea typeface="BIZ UDPゴシック"/>
+                          <a:cs typeface="BIZ UDPゴシック"/>
                         </a:rPr>
                         <a:t>PI・行動変容・アバター・推し活</a:t>
                       </a:r>
@@ -9121,6 +9405,9 @@
                           <a:solidFill>
                             <a:srgbClr val="24303F"/>
                           </a:solidFill>
+                          <a:latin typeface="BIZ UDPゴシック"/>
+                          <a:ea typeface="BIZ UDPゴシック"/>
+                          <a:cs typeface="BIZ UDPゴシック"/>
                         </a:rPr>
                         <a:t>12/26–12/30</a:t>
                       </a:r>
@@ -9172,6 +9459,9 @@
                           <a:solidFill>
                             <a:srgbClr val="24303F"/>
                           </a:solidFill>
+                          <a:latin typeface="BIZ UDPゴシック"/>
+                          <a:ea typeface="BIZ UDPゴシック"/>
+                          <a:cs typeface="BIZ UDPゴシック"/>
                         </a:rPr>
                         <a:t>3章 予備調査</a:t>
                       </a:r>
@@ -9221,6 +9511,9 @@
                           <a:solidFill>
                             <a:srgbClr val="24303F"/>
                           </a:solidFill>
+                          <a:latin typeface="BIZ UDPゴシック"/>
+                          <a:ea typeface="BIZ UDPゴシック"/>
+                          <a:cs typeface="BIZ UDPゴシック"/>
                         </a:rPr>
                         <a:t>215名の調査とパス解析</a:t>
                       </a:r>
@@ -9270,6 +9563,9 @@
                           <a:solidFill>
                             <a:srgbClr val="24303F"/>
                           </a:solidFill>
+                          <a:latin typeface="BIZ UDPゴシック"/>
+                          <a:ea typeface="BIZ UDPゴシック"/>
+                          <a:cs typeface="BIZ UDPゴシック"/>
                         </a:rPr>
                         <a:t>1/4–1/7</a:t>
                       </a:r>
@@ -9321,6 +9617,9 @@
                           <a:solidFill>
                             <a:srgbClr val="24303F"/>
                           </a:solidFill>
+                          <a:latin typeface="BIZ UDPゴシック"/>
+                          <a:ea typeface="BIZ UDPゴシック"/>
+                          <a:cs typeface="BIZ UDPゴシック"/>
                         </a:rPr>
                         <a:t>4章 システム</a:t>
                       </a:r>
@@ -9370,6 +9669,9 @@
                           <a:solidFill>
                             <a:srgbClr val="24303F"/>
                           </a:solidFill>
+                          <a:latin typeface="BIZ UDPゴシック"/>
+                          <a:ea typeface="BIZ UDPゴシック"/>
+                          <a:cs typeface="BIZ UDPゴシック"/>
                         </a:rPr>
                         <a:t>OshiFit（ツイン・提案・ゆらぎ）</a:t>
                       </a:r>
@@ -9419,6 +9721,9 @@
                           <a:solidFill>
                             <a:srgbClr val="24303F"/>
                           </a:solidFill>
+                          <a:latin typeface="BIZ UDPゴシック"/>
+                          <a:ea typeface="BIZ UDPゴシック"/>
+                          <a:cs typeface="BIZ UDPゴシック"/>
                         </a:rPr>
                         <a:t>1/8–1/12</a:t>
                       </a:r>
@@ -9470,6 +9775,9 @@
                           <a:solidFill>
                             <a:srgbClr val="24303F"/>
                           </a:solidFill>
+                          <a:latin typeface="BIZ UDPゴシック"/>
+                          <a:ea typeface="BIZ UDPゴシック"/>
+                          <a:cs typeface="BIZ UDPゴシック"/>
                         </a:rPr>
                         <a:t>5章 実験</a:t>
                       </a:r>
@@ -9519,6 +9827,9 @@
                           <a:solidFill>
                             <a:srgbClr val="24303F"/>
                           </a:solidFill>
+                          <a:latin typeface="BIZ UDPゴシック"/>
+                          <a:ea typeface="BIZ UDPゴシック"/>
+                          <a:cs typeface="BIZ UDPゴシック"/>
                         </a:rPr>
                         <a:t>6週間・3群の比較実験と結果</a:t>
                       </a:r>
@@ -9568,6 +9879,9 @@
                           <a:solidFill>
                             <a:srgbClr val="24303F"/>
                           </a:solidFill>
+                          <a:latin typeface="BIZ UDPゴシック"/>
+                          <a:ea typeface="BIZ UDPゴシック"/>
+                          <a:cs typeface="BIZ UDPゴシック"/>
                         </a:rPr>
                         <a:t>1/13–1/18</a:t>
                       </a:r>
@@ -9619,6 +9933,9 @@
                           <a:solidFill>
                             <a:srgbClr val="24303F"/>
                           </a:solidFill>
+                          <a:latin typeface="BIZ UDPゴシック"/>
+                          <a:ea typeface="BIZ UDPゴシック"/>
+                          <a:cs typeface="BIZ UDPゴシック"/>
                         </a:rPr>
                         <a:t>6章 考察</a:t>
                       </a:r>
@@ -9668,6 +9985,9 @@
                           <a:solidFill>
                             <a:srgbClr val="24303F"/>
                           </a:solidFill>
+                          <a:latin typeface="BIZ UDPゴシック"/>
+                          <a:ea typeface="BIZ UDPゴシック"/>
+                          <a:cs typeface="BIZ UDPゴシック"/>
                         </a:rPr>
                         <a:t>RQごとの考察・限界</a:t>
                       </a:r>
@@ -9717,6 +10037,9 @@
                           <a:solidFill>
                             <a:srgbClr val="24303F"/>
                           </a:solidFill>
+                          <a:latin typeface="BIZ UDPゴシック"/>
+                          <a:ea typeface="BIZ UDPゴシック"/>
+                          <a:cs typeface="BIZ UDPゴシック"/>
                         </a:rPr>
                         <a:t>1/19–1/22</a:t>
                       </a:r>
@@ -9768,6 +10091,9 @@
                           <a:solidFill>
                             <a:srgbClr val="24303F"/>
                           </a:solidFill>
+                          <a:latin typeface="BIZ UDPゴシック"/>
+                          <a:ea typeface="BIZ UDPゴシック"/>
+                          <a:cs typeface="BIZ UDPゴシック"/>
                         </a:rPr>
                         <a:t>7章 結論</a:t>
                       </a:r>
@@ -9817,6 +10143,9 @@
                           <a:solidFill>
                             <a:srgbClr val="24303F"/>
                           </a:solidFill>
+                          <a:latin typeface="BIZ UDPゴシック"/>
+                          <a:ea typeface="BIZ UDPゴシック"/>
+                          <a:cs typeface="BIZ UDPゴシック"/>
                         </a:rPr>
                         <a:t>まとめと展望</a:t>
                       </a:r>
@@ -9866,6 +10195,9 @@
                           <a:solidFill>
                             <a:srgbClr val="24303F"/>
                           </a:solidFill>
+                          <a:latin typeface="BIZ UDPゴシック"/>
+                          <a:ea typeface="BIZ UDPゴシック"/>
+                          <a:cs typeface="BIZ UDPゴシック"/>
                         </a:rPr>
                         <a:t>1/23</a:t>
                       </a:r>
@@ -9935,6 +10267,9 @@
                 <a:solidFill>
                   <a:srgbClr val="0B3C6E"/>
                 </a:solidFill>
+                <a:latin typeface="BIZ UDPゴシック"/>
+                <a:ea typeface="BIZ UDPゴシック"/>
+                <a:cs typeface="BIZ UDPゴシック"/>
               </a:rPr>
               <a:t>節目</a:t>
             </a:r>
@@ -9996,6 +10331,9 @@
                 <a:solidFill>
                   <a:srgbClr val="FFFFFF"/>
                 </a:solidFill>
+                <a:latin typeface="BIZ UDPゴシック"/>
+                <a:ea typeface="BIZ UDPゴシック"/>
+                <a:cs typeface="BIZ UDPゴシック"/>
               </a:rPr>
               <a:t>12/25</a:t>
             </a:r>
@@ -10035,6 +10373,9 @@
                 <a:solidFill>
                   <a:srgbClr val="24303F"/>
                 </a:solidFill>
+                <a:latin typeface="BIZ UDPゴシック"/>
+                <a:ea typeface="BIZ UDPゴシック"/>
+                <a:cs typeface="BIZ UDPゴシック"/>
               </a:rPr>
               <a:t>1章を先生に提出</a:t>
             </a:r>
@@ -10096,6 +10437,9 @@
                 <a:solidFill>
                   <a:srgbClr val="FFFFFF"/>
                 </a:solidFill>
+                <a:latin typeface="BIZ UDPゴシック"/>
+                <a:ea typeface="BIZ UDPゴシック"/>
+                <a:cs typeface="BIZ UDPゴシック"/>
               </a:rPr>
               <a:t>1/12</a:t>
             </a:r>
@@ -10135,6 +10479,9 @@
                 <a:solidFill>
                   <a:srgbClr val="24303F"/>
                 </a:solidFill>
+                <a:latin typeface="BIZ UDPゴシック"/>
+                <a:ea typeface="BIZ UDPゴシック"/>
+                <a:cs typeface="BIZ UDPゴシック"/>
               </a:rPr>
               <a:t>4章まで提出</a:t>
             </a:r>
@@ -10196,6 +10543,9 @@
                 <a:solidFill>
                   <a:srgbClr val="FFFFFF"/>
                 </a:solidFill>
+                <a:latin typeface="BIZ UDPゴシック"/>
+                <a:ea typeface="BIZ UDPゴシック"/>
+                <a:cs typeface="BIZ UDPゴシック"/>
               </a:rPr>
               <a:t>1/24–27</a:t>
             </a:r>
@@ -10235,6 +10585,9 @@
                 <a:solidFill>
                   <a:srgbClr val="24303F"/>
                 </a:solidFill>
+                <a:latin typeface="BIZ UDPゴシック"/>
+                <a:ea typeface="BIZ UDPゴシック"/>
+                <a:cs typeface="BIZ UDPゴシック"/>
               </a:rPr>
               <a:t>全体の確認・修正</a:t>
             </a:r>
@@ -10296,6 +10649,9 @@
                 <a:solidFill>
                   <a:srgbClr val="FFFFFF"/>
                 </a:solidFill>
+                <a:latin typeface="BIZ UDPゴシック"/>
+                <a:ea typeface="BIZ UDPゴシック"/>
+                <a:cs typeface="BIZ UDPゴシック"/>
               </a:rPr>
               <a:t>1/29</a:t>
             </a:r>
@@ -10335,6 +10691,9 @@
                 <a:solidFill>
                   <a:srgbClr val="24303F"/>
                 </a:solidFill>
+                <a:latin typeface="BIZ UDPゴシック"/>
+                <a:ea typeface="BIZ UDPゴシック"/>
+                <a:cs typeface="BIZ UDPゴシック"/>
               </a:rPr>
               <a:t>修論提出</a:t>
             </a:r>
@@ -10396,6 +10755,9 @@
                 <a:solidFill>
                   <a:srgbClr val="FFFFFF"/>
                 </a:solidFill>
+                <a:latin typeface="BIZ UDPゴシック"/>
+                <a:ea typeface="BIZ UDPゴシック"/>
+                <a:cs typeface="BIZ UDPゴシック"/>
               </a:rPr>
               <a:t>2/17</a:t>
             </a:r>
@@ -10435,6 +10797,9 @@
                 <a:solidFill>
                   <a:srgbClr val="24303F"/>
                 </a:solidFill>
+                <a:latin typeface="BIZ UDPゴシック"/>
+                <a:ea typeface="BIZ UDPゴシック"/>
+                <a:cs typeface="BIZ UDPゴシック"/>
               </a:rPr>
               <a:t>公聴会</a:t>
             </a:r>
@@ -10496,6 +10861,9 @@
                 <a:solidFill>
                   <a:srgbClr val="0B3C6E"/>
                 </a:solidFill>
+                <a:latin typeface="BIZ UDPゴシック"/>
+                <a:ea typeface="BIZ UDPゴシック"/>
+                <a:cs typeface="BIZ UDPゴシック"/>
               </a:rPr>
               <a:t>3章は IEVC・関西支部大会の原稿を、4章は CHIIR の原稿を下敷きにする</a:t>
             </a:r>
@@ -10548,6 +10916,9 @@
                 <a:solidFill>
                   <a:srgbClr val="24303F"/>
                 </a:solidFill>
+                <a:latin typeface="BIZ UDPゴシック"/>
+                <a:ea typeface="BIZ UDPゴシック"/>
+                <a:cs typeface="BIZ UDPゴシック"/>
               </a:rPr>
               <a:t>相談事項と次の予定</a:t>
             </a:r>
@@ -10566,9 +10937,14 @@
         </p:nvSpPr>
         <p:spPr/>
         <p:txBody>
-          <a:bodyPr/>
-          <a:p>
-            <a:r>
+          <a:bodyPr lIns="27432" rIns="0" wrap="none"/>
+          <a:p>
+            <a:r>
+              <a:rPr sz="900">
+                <a:latin typeface="BIZ UDPゴシック"/>
+                <a:ea typeface="BIZ UDPゴシック"/>
+                <a:cs typeface="BIZ UDPゴシック"/>
+              </a:rPr>
               <a:t>2026/12/18</a:t>
             </a:r>
           </a:p>
@@ -10589,7 +10965,11 @@
           <a:bodyPr/>
           <a:p>
             <a:fld id="{B6F15528-21DE-4FAA-801E-634DDDAF4B2B}" type="slidenum">
-              <a:rPr lang="en-US"/>
+              <a:rPr lang="en-US">
+                <a:latin typeface="BIZ UDPゴシック"/>
+                <a:ea typeface="BIZ UDPゴシック"/>
+                <a:cs typeface="BIZ UDPゴシック"/>
+              </a:rPr>
               <a:t>13</a:t>
             </a:fld>
           </a:p>
@@ -10738,6 +11118,9 @@
                 <a:solidFill>
                   <a:srgbClr val="E8457C"/>
                 </a:solidFill>
+                <a:latin typeface="BIZ UDPゴシック"/>
+                <a:ea typeface="BIZ UDPゴシック"/>
+                <a:cs typeface="BIZ UDPゴシック"/>
               </a:rPr>
               <a:t>相談したいこと</a:t>
             </a:r>
@@ -10777,6 +11160,9 @@
                 <a:solidFill>
                   <a:srgbClr val="0B3C6E"/>
                 </a:solidFill>
+                <a:latin typeface="BIZ UDPゴシック"/>
+                <a:ea typeface="BIZ UDPゴシック"/>
+                <a:cs typeface="BIZ UDPゴシック"/>
               </a:rPr>
               <a:t>主要な比較で有意差が出なかった RQ3 の書き方</a:t>
             </a:r>
@@ -10793,6 +11179,9 @@
                 <a:solidFill>
                   <a:srgbClr val="24303F"/>
                 </a:solidFill>
+                <a:latin typeface="BIZ UDPゴシック"/>
+                <a:ea typeface="BIZ UDPゴシック"/>
+                <a:cs typeface="BIZ UDPゴシック"/>
               </a:rPr>
               <a:t>「傾向あり」とは書かず、効果量と信頼区間で報告し、必要人数の再計算を今後の課題にする案でよいか</a:t>
             </a:r>
@@ -10809,6 +11198,9 @@
                 <a:solidFill>
                   <a:srgbClr val="0B3C6E"/>
                 </a:solidFill>
+                <a:latin typeface="BIZ UDPゴシック"/>
+                <a:ea typeface="BIZ UDPゴシック"/>
+                <a:cs typeface="BIZ UDPゴシック"/>
               </a:rPr>
               <a:t>記録率の群差（群C 86% / 群A 81%）による欠測の偏り</a:t>
             </a:r>
@@ -10825,6 +11217,9 @@
                 <a:solidFill>
                   <a:srgbClr val="24303F"/>
                 </a:solidFill>
+                <a:latin typeface="BIZ UDPゴシック"/>
+                <a:ea typeface="BIZ UDPゴシック"/>
+                <a:cs typeface="BIZ UDPゴシック"/>
               </a:rPr>
               <a:t>多重代入の感度分析を本文の表に並べ、結論が変わらないことを示す</a:t>
             </a:r>
@@ -10841,6 +11236,9 @@
                 <a:solidFill>
                   <a:srgbClr val="0B3C6E"/>
                 </a:solidFill>
+                <a:latin typeface="BIZ UDPゴシック"/>
+                <a:ea typeface="BIZ UDPゴシック"/>
+                <a:cs typeface="BIZ UDPゴシック"/>
               </a:rPr>
               <a:t>CHIIR 2027 採択（12/15 通知）後の作業と IEEE Access への投稿時期</a:t>
             </a:r>
@@ -10857,6 +11255,9 @@
                 <a:solidFill>
                   <a:srgbClr val="24303F"/>
                 </a:solidFill>
+                <a:latin typeface="BIZ UDPゴシック"/>
+                <a:ea typeface="BIZ UDPゴシック"/>
+                <a:cs typeface="BIZ UDPゴシック"/>
               </a:rPr>
               <a:t>カメラレディは1月中旬。修論提出後の2月に IEEE Access の原稿をまとめる</a:t>
             </a:r>
@@ -11006,6 +11407,9 @@
                 <a:solidFill>
                   <a:srgbClr val="0B3C6E"/>
                 </a:solidFill>
+                <a:latin typeface="BIZ UDPゴシック"/>
+                <a:ea typeface="BIZ UDPゴシック"/>
+                <a:cs typeface="BIZ UDPゴシック"/>
               </a:rPr>
               <a:t>次回（1月）に見せるもの</a:t>
             </a:r>
@@ -11022,6 +11426,9 @@
                 <a:solidFill>
                   <a:srgbClr val="24303F"/>
                 </a:solidFill>
+                <a:latin typeface="BIZ UDPゴシック"/>
+                <a:ea typeface="BIZ UDPゴシック"/>
+                <a:cs typeface="BIZ UDPゴシック"/>
               </a:rPr>
               <a:t>感度分析を含めた確定値／修論の1〜4章の草稿／公聴会スライドの骨子</a:t>
             </a:r>
@@ -11085,6 +11492,9 @@
                 <a:solidFill>
                   <a:srgbClr val="E8457C"/>
                 </a:solidFill>
+                <a:latin typeface="BIZ UDPゴシック"/>
+                <a:ea typeface="BIZ UDPゴシック"/>
+                <a:cs typeface="BIZ UDPゴシック"/>
               </a:rPr>
               <a:t>※ 採否・数値は想定</a:t>
             </a:r>
@@ -11137,6 +11547,9 @@
                 <a:solidFill>
                   <a:srgbClr val="24303F"/>
                 </a:solidFill>
+                <a:latin typeface="BIZ UDPゴシック"/>
+                <a:ea typeface="BIZ UDPゴシック"/>
+                <a:cs typeface="BIZ UDPゴシック"/>
               </a:rPr>
               <a:t>結果のまとめ（速報）</a:t>
             </a:r>
@@ -11155,9 +11568,14 @@
         </p:nvSpPr>
         <p:spPr/>
         <p:txBody>
-          <a:bodyPr/>
-          <a:p>
-            <a:r>
+          <a:bodyPr lIns="27432" rIns="0" wrap="none"/>
+          <a:p>
+            <a:r>
+              <a:rPr sz="900">
+                <a:latin typeface="BIZ UDPゴシック"/>
+                <a:ea typeface="BIZ UDPゴシック"/>
+                <a:cs typeface="BIZ UDPゴシック"/>
+              </a:rPr>
               <a:t>2026/12/18</a:t>
             </a:r>
           </a:p>
@@ -11178,7 +11596,11 @@
           <a:bodyPr/>
           <a:p>
             <a:fld id="{B6F15528-21DE-4FAA-801E-634DDDAF4B2B}" type="slidenum">
-              <a:rPr lang="en-US"/>
+              <a:rPr lang="en-US">
+                <a:latin typeface="BIZ UDPゴシック"/>
+                <a:ea typeface="BIZ UDPゴシック"/>
+                <a:cs typeface="BIZ UDPゴシック"/>
+              </a:rPr>
               <a:t>2</a:t>
             </a:fld>
           </a:p>
@@ -11289,6 +11711,9 @@
                 <a:solidFill>
                   <a:srgbClr val="FFFFFF"/>
                 </a:solidFill>
+                <a:latin typeface="BIZ UDPゴシック"/>
+                <a:ea typeface="BIZ UDPゴシック"/>
+                <a:cs typeface="BIZ UDPゴシック"/>
               </a:rPr>
               <a:t>○</a:t>
             </a:r>
@@ -11328,6 +11753,9 @@
                 <a:solidFill>
                   <a:srgbClr val="0B3C6E"/>
                 </a:solidFill>
+                <a:latin typeface="BIZ UDPゴシック"/>
+                <a:ea typeface="BIZ UDPゴシック"/>
+                <a:cs typeface="BIZ UDPゴシック"/>
               </a:rPr>
               <a:t>RQ1</a:t>
             </a:r>
@@ -11344,6 +11772,9 @@
                 <a:solidFill>
                   <a:srgbClr val="5A6676"/>
                 </a:solidFill>
+                <a:latin typeface="BIZ UDPゴシック"/>
+                <a:ea typeface="BIZ UDPゴシック"/>
+                <a:cs typeface="BIZ UDPゴシック"/>
               </a:rPr>
               <a:t>予測の精度</a:t>
             </a:r>
@@ -11383,6 +11814,9 @@
                 <a:solidFill>
                   <a:srgbClr val="24303F"/>
                 </a:solidFill>
+                <a:latin typeface="BIZ UDPゴシック"/>
+                <a:ea typeface="BIZ UDPゴシック"/>
+                <a:cs typeface="BIZ UDPゴシック"/>
               </a:rPr>
               <a:t>個人補正で予測の誤差が約26%減った（推し疲れ）</a:t>
             </a:r>
@@ -11399,6 +11833,9 @@
                 <a:solidFill>
                   <a:srgbClr val="5A6676"/>
                 </a:solidFill>
+                <a:latin typeface="BIZ UDPゴシック"/>
+                <a:ea typeface="BIZ UDPゴシック"/>
+                <a:cs typeface="BIZ UDPゴシック"/>
               </a:rPr>
               <a:t>80%区間に入った割合は 76%（目標 80%）</a:t>
             </a:r>
@@ -11510,6 +11947,9 @@
                 <a:solidFill>
                   <a:srgbClr val="FFFFFF"/>
                 </a:solidFill>
+                <a:latin typeface="BIZ UDPゴシック"/>
+                <a:ea typeface="BIZ UDPゴシック"/>
+                <a:cs typeface="BIZ UDPゴシック"/>
               </a:rPr>
               <a:t>○</a:t>
             </a:r>
@@ -11549,6 +11989,9 @@
                 <a:solidFill>
                   <a:srgbClr val="0B3C6E"/>
                 </a:solidFill>
+                <a:latin typeface="BIZ UDPゴシック"/>
+                <a:ea typeface="BIZ UDPゴシック"/>
+                <a:cs typeface="BIZ UDPゴシック"/>
               </a:rPr>
               <a:t>RQ2</a:t>
             </a:r>
@@ -11565,6 +12008,9 @@
                 <a:solidFill>
                   <a:srgbClr val="5A6676"/>
                 </a:solidFill>
+                <a:latin typeface="BIZ UDPゴシック"/>
+                <a:ea typeface="BIZ UDPゴシック"/>
+                <a:cs typeface="BIZ UDPゴシック"/>
               </a:rPr>
               <a:t>アバターで実行は増えるか</a:t>
             </a:r>
@@ -11604,6 +12050,9 @@
                 <a:solidFill>
                   <a:srgbClr val="24303F"/>
                 </a:solidFill>
+                <a:latin typeface="BIZ UDPゴシック"/>
+                <a:ea typeface="BIZ UDPゴシック"/>
+                <a:cs typeface="BIZ UDPゴシック"/>
               </a:rPr>
               <a:t>群Cの実行率が群Bより高い（オッズ比 1.71）</a:t>
             </a:r>
@@ -11620,6 +12069,9 @@
                 <a:solidFill>
                   <a:srgbClr val="5A6676"/>
                 </a:solidFill>
+                <a:latin typeface="BIZ UDPゴシック"/>
+                <a:ea typeface="BIZ UDPゴシック"/>
+                <a:cs typeface="BIZ UDPゴシック"/>
               </a:rPr>
               <a:t>4週間を通して群Cが約12ポイント上回った</a:t>
             </a:r>
@@ -11731,6 +12183,9 @@
                 <a:solidFill>
                   <a:srgbClr val="FFFFFF"/>
                 </a:solidFill>
+                <a:latin typeface="BIZ UDPゴシック"/>
+                <a:ea typeface="BIZ UDPゴシック"/>
+                <a:cs typeface="BIZ UDPゴシック"/>
               </a:rPr>
               <a:t>△</a:t>
             </a:r>
@@ -11770,6 +12225,9 @@
                 <a:solidFill>
                   <a:srgbClr val="0B3C6E"/>
                 </a:solidFill>
+                <a:latin typeface="BIZ UDPゴシック"/>
+                <a:ea typeface="BIZ UDPゴシック"/>
+                <a:cs typeface="BIZ UDPゴシック"/>
               </a:rPr>
               <a:t>RQ3</a:t>
             </a:r>
@@ -11786,6 +12244,9 @@
                 <a:solidFill>
                   <a:srgbClr val="5A6676"/>
                 </a:solidFill>
+                <a:latin typeface="BIZ UDPゴシック"/>
+                <a:ea typeface="BIZ UDPゴシック"/>
+                <a:cs typeface="BIZ UDPゴシック"/>
               </a:rPr>
               <a:t>ウェルビーイングは上がるか</a:t>
             </a:r>
@@ -11825,6 +12286,9 @@
                 <a:solidFill>
                   <a:srgbClr val="24303F"/>
                 </a:solidFill>
+                <a:latin typeface="BIZ UDPゴシック"/>
+                <a:ea typeface="BIZ UDPゴシック"/>
+                <a:cs typeface="BIZ UDPゴシック"/>
               </a:rPr>
               <a:t>WHO-5 は群Cで上がったが、主要な比較は有意差なし</a:t>
             </a:r>
@@ -11841,6 +12305,9 @@
                 <a:solidFill>
                   <a:srgbClr val="5A6676"/>
                 </a:solidFill>
+                <a:latin typeface="BIZ UDPゴシック"/>
+                <a:ea typeface="BIZ UDPゴシック"/>
+                <a:cs typeface="BIZ UDPゴシック"/>
               </a:rPr>
               <a:t>群C−群B +0.9（Holm 補正後 p = .16）。群C−群A は +1.7（探索的）</a:t>
             </a:r>
@@ -11902,6 +12369,9 @@
                 <a:solidFill>
                   <a:srgbClr val="0B3C6E"/>
                 </a:solidFill>
+                <a:latin typeface="BIZ UDPゴシック"/>
+                <a:ea typeface="BIZ UDPゴシック"/>
+                <a:cs typeface="BIZ UDPゴシック"/>
               </a:rPr>
               <a:t>前回からの差分：実験完了（12/13）→ 事後アンケート回収（197名）→ 事前に決めた解析を実施（12/17）</a:t>
             </a:r>
@@ -11965,6 +12435,9 @@
                 <a:solidFill>
                   <a:srgbClr val="E8457C"/>
                 </a:solidFill>
+                <a:latin typeface="BIZ UDPゴシック"/>
+                <a:ea typeface="BIZ UDPゴシック"/>
+                <a:cs typeface="BIZ UDPゴシック"/>
               </a:rPr>
               <a:t>※ 想定値：実データで差し替え</a:t>
             </a:r>
@@ -12017,6 +12490,9 @@
                 <a:solidFill>
                   <a:srgbClr val="24303F"/>
                 </a:solidFill>
+                <a:latin typeface="BIZ UDPゴシック"/>
+                <a:ea typeface="BIZ UDPゴシック"/>
+                <a:cs typeface="BIZ UDPゴシック"/>
               </a:rPr>
               <a:t>全体スケジュールと現在地</a:t>
             </a:r>
@@ -12035,9 +12511,14 @@
         </p:nvSpPr>
         <p:spPr/>
         <p:txBody>
-          <a:bodyPr/>
-          <a:p>
-            <a:r>
+          <a:bodyPr lIns="27432" rIns="0" wrap="none"/>
+          <a:p>
+            <a:r>
+              <a:rPr sz="900">
+                <a:latin typeface="BIZ UDPゴシック"/>
+                <a:ea typeface="BIZ UDPゴシック"/>
+                <a:cs typeface="BIZ UDPゴシック"/>
+              </a:rPr>
               <a:t>2026/12/18</a:t>
             </a:r>
           </a:p>
@@ -12058,7 +12539,11 @@
           <a:bodyPr/>
           <a:p>
             <a:fld id="{B6F15528-21DE-4FAA-801E-634DDDAF4B2B}" type="slidenum">
-              <a:rPr lang="en-US"/>
+              <a:rPr lang="en-US">
+                <a:latin typeface="BIZ UDPゴシック"/>
+                <a:ea typeface="BIZ UDPゴシック"/>
+                <a:cs typeface="BIZ UDPゴシック"/>
+              </a:rPr>
               <a:t>3</a:t>
             </a:fld>
           </a:p>
@@ -12097,6 +12582,9 @@
                 <a:solidFill>
                   <a:srgbClr val="5A6676"/>
                 </a:solidFill>
+                <a:latin typeface="BIZ UDPゴシック"/>
+                <a:ea typeface="BIZ UDPゴシック"/>
+                <a:cs typeface="BIZ UDPゴシック"/>
               </a:rPr>
               <a:t>10月</a:t>
             </a:r>
@@ -12171,6 +12659,9 @@
                 <a:solidFill>
                   <a:srgbClr val="5A6676"/>
                 </a:solidFill>
+                <a:latin typeface="BIZ UDPゴシック"/>
+                <a:ea typeface="BIZ UDPゴシック"/>
+                <a:cs typeface="BIZ UDPゴシック"/>
               </a:rPr>
               <a:t>11月</a:t>
             </a:r>
@@ -12245,6 +12736,9 @@
                 <a:solidFill>
                   <a:srgbClr val="5A6676"/>
                 </a:solidFill>
+                <a:latin typeface="BIZ UDPゴシック"/>
+                <a:ea typeface="BIZ UDPゴシック"/>
+                <a:cs typeface="BIZ UDPゴシック"/>
               </a:rPr>
               <a:t>12月</a:t>
             </a:r>
@@ -12319,6 +12813,9 @@
                 <a:solidFill>
                   <a:srgbClr val="5A6676"/>
                 </a:solidFill>
+                <a:latin typeface="BIZ UDPゴシック"/>
+                <a:ea typeface="BIZ UDPゴシック"/>
+                <a:cs typeface="BIZ UDPゴシック"/>
               </a:rPr>
               <a:t>1月</a:t>
             </a:r>
@@ -12393,6 +12890,9 @@
                 <a:solidFill>
                   <a:srgbClr val="5A6676"/>
                 </a:solidFill>
+                <a:latin typeface="BIZ UDPゴシック"/>
+                <a:ea typeface="BIZ UDPゴシック"/>
+                <a:cs typeface="BIZ UDPゴシック"/>
               </a:rPr>
               <a:t>2月</a:t>
             </a:r>
@@ -12467,6 +12967,9 @@
                 <a:solidFill>
                   <a:srgbClr val="5A6676"/>
                 </a:solidFill>
+                <a:latin typeface="BIZ UDPゴシック"/>
+                <a:ea typeface="BIZ UDPゴシック"/>
+                <a:cs typeface="BIZ UDPゴシック"/>
               </a:rPr>
               <a:t>3月</a:t>
             </a:r>
@@ -12541,6 +13044,9 @@
                 <a:solidFill>
                   <a:srgbClr val="0B3C6E"/>
                 </a:solidFill>
+                <a:latin typeface="BIZ UDPゴシック"/>
+                <a:ea typeface="BIZ UDPゴシック"/>
+                <a:cs typeface="BIZ UDPゴシック"/>
               </a:rPr>
               <a:t>システム開発</a:t>
             </a:r>
@@ -12668,8 +13174,11 @@
                 <a:solidFill>
                   <a:srgbClr val="FFFFFF"/>
                 </a:solidFill>
+                <a:latin typeface="BIZ UDPゴシック"/>
+                <a:ea typeface="BIZ UDPゴシック"/>
+                <a:cs typeface="BIZ UDPゴシック"/>
               </a:rPr>
-              <a:t>設計 → β版</a:t>
+              <a:t>設計 → ベータ版</a:t>
             </a:r>
           </a:p>
         </p:txBody>
@@ -12707,6 +13216,9 @@
                 <a:solidFill>
                   <a:srgbClr val="0B3C6E"/>
                 </a:solidFill>
+                <a:latin typeface="BIZ UDPゴシック"/>
+                <a:ea typeface="BIZ UDPゴシック"/>
+                <a:cs typeface="BIZ UDPゴシック"/>
               </a:rPr>
               <a:t>倫理審査・募集</a:t>
             </a:r>
@@ -12834,6 +13346,9 @@
                 <a:solidFill>
                   <a:srgbClr val="FFFFFF"/>
                 </a:solidFill>
+                <a:latin typeface="BIZ UDPゴシック"/>
+                <a:ea typeface="BIZ UDPゴシック"/>
+                <a:cs typeface="BIZ UDPゴシック"/>
               </a:rPr>
               <a:t>審査</a:t>
             </a:r>
@@ -12961,6 +13476,9 @@
                 <a:solidFill>
                   <a:srgbClr val="FFFFFF"/>
                 </a:solidFill>
+                <a:latin typeface="BIZ UDPゴシック"/>
+                <a:ea typeface="BIZ UDPゴシック"/>
+                <a:cs typeface="BIZ UDPゴシック"/>
               </a:rPr>
               <a:t>募集</a:t>
             </a:r>
@@ -13000,6 +13518,9 @@
                 <a:solidFill>
                   <a:srgbClr val="0B3C6E"/>
                 </a:solidFill>
+                <a:latin typeface="BIZ UDPゴシック"/>
+                <a:ea typeface="BIZ UDPゴシック"/>
+                <a:cs typeface="BIZ UDPゴシック"/>
               </a:rPr>
               <a:t>本実験（6週間）</a:t>
             </a:r>
@@ -13127,6 +13648,9 @@
                 <a:solidFill>
                   <a:srgbClr val="FFFFFF"/>
                 </a:solidFill>
+                <a:latin typeface="BIZ UDPゴシック"/>
+                <a:ea typeface="BIZ UDPゴシック"/>
+                <a:cs typeface="BIZ UDPゴシック"/>
               </a:rPr>
               <a:t>記録のみ</a:t>
             </a:r>
@@ -13254,6 +13778,9 @@
                 <a:solidFill>
                   <a:srgbClr val="FFFFFF"/>
                 </a:solidFill>
+                <a:latin typeface="BIZ UDPゴシック"/>
+                <a:ea typeface="BIZ UDPゴシック"/>
+                <a:cs typeface="BIZ UDPゴシック"/>
               </a:rPr>
               <a:t>介入（3群）</a:t>
             </a:r>
@@ -13293,6 +13820,9 @@
                 <a:solidFill>
                   <a:srgbClr val="0B3C6E"/>
                 </a:solidFill>
+                <a:latin typeface="BIZ UDPゴシック"/>
+                <a:ea typeface="BIZ UDPゴシック"/>
+                <a:cs typeface="BIZ UDPゴシック"/>
               </a:rPr>
               <a:t>解析・修論</a:t>
             </a:r>
@@ -13420,6 +13950,9 @@
                 <a:solidFill>
                   <a:srgbClr val="0B3C6E"/>
                 </a:solidFill>
+                <a:latin typeface="BIZ UDPゴシック"/>
+                <a:ea typeface="BIZ UDPゴシック"/>
+                <a:cs typeface="BIZ UDPゴシック"/>
               </a:rPr>
               <a:t>解析 → 執筆</a:t>
             </a:r>
@@ -13459,6 +13992,9 @@
                 <a:solidFill>
                   <a:srgbClr val="0B3C6E"/>
                 </a:solidFill>
+                <a:latin typeface="BIZ UDPゴシック"/>
+                <a:ea typeface="BIZ UDPゴシック"/>
+                <a:cs typeface="BIZ UDPゴシック"/>
               </a:rPr>
               <a:t>対外発表</a:t>
             </a:r>
@@ -13542,6 +14078,9 @@
                 <a:solidFill>
                   <a:srgbClr val="24303F"/>
                 </a:solidFill>
+                <a:latin typeface="BIZ UDPゴシック"/>
+                <a:ea typeface="BIZ UDPゴシック"/>
+                <a:cs typeface="BIZ UDPゴシック"/>
               </a:rPr>
               <a:t>CHIIR投稿</a:t>
             </a:r>
@@ -13558,6 +14097,9 @@
                 <a:solidFill>
                   <a:srgbClr val="24303F"/>
                 </a:solidFill>
+                <a:latin typeface="BIZ UDPゴシック"/>
+                <a:ea typeface="BIZ UDPゴシック"/>
+                <a:cs typeface="BIZ UDPゴシック"/>
               </a:rPr>
               <a:t>10/29</a:t>
             </a:r>
@@ -13641,6 +14183,9 @@
                 <a:solidFill>
                   <a:srgbClr val="24303F"/>
                 </a:solidFill>
+                <a:latin typeface="BIZ UDPゴシック"/>
+                <a:ea typeface="BIZ UDPゴシック"/>
+                <a:cs typeface="BIZ UDPゴシック"/>
               </a:rPr>
               <a:t>修論提出</a:t>
             </a:r>
@@ -13657,6 +14202,9 @@
                 <a:solidFill>
                   <a:srgbClr val="24303F"/>
                 </a:solidFill>
+                <a:latin typeface="BIZ UDPゴシック"/>
+                <a:ea typeface="BIZ UDPゴシック"/>
+                <a:cs typeface="BIZ UDPゴシック"/>
               </a:rPr>
               <a:t>1/29</a:t>
             </a:r>
@@ -13740,6 +14288,9 @@
                 <a:solidFill>
                   <a:srgbClr val="24303F"/>
                 </a:solidFill>
+                <a:latin typeface="BIZ UDPゴシック"/>
+                <a:ea typeface="BIZ UDPゴシック"/>
+                <a:cs typeface="BIZ UDPゴシック"/>
               </a:rPr>
               <a:t>公聴会</a:t>
             </a:r>
@@ -13756,6 +14307,9 @@
                 <a:solidFill>
                   <a:srgbClr val="24303F"/>
                 </a:solidFill>
+                <a:latin typeface="BIZ UDPゴシック"/>
+                <a:ea typeface="BIZ UDPゴシック"/>
+                <a:cs typeface="BIZ UDPゴシック"/>
               </a:rPr>
               <a:t>2/17</a:t>
             </a:r>
@@ -13839,6 +14393,9 @@
                 <a:solidFill>
                   <a:srgbClr val="24303F"/>
                 </a:solidFill>
+                <a:latin typeface="BIZ UDPゴシック"/>
+                <a:ea typeface="BIZ UDPゴシック"/>
+                <a:cs typeface="BIZ UDPゴシック"/>
               </a:rPr>
               <a:t>CHIIR</a:t>
             </a:r>
@@ -13855,6 +14412,9 @@
                 <a:solidFill>
                   <a:srgbClr val="24303F"/>
                 </a:solidFill>
+                <a:latin typeface="BIZ UDPゴシック"/>
+                <a:ea typeface="BIZ UDPゴシック"/>
+                <a:cs typeface="BIZ UDPゴシック"/>
               </a:rPr>
               <a:t>3/7–11</a:t>
             </a:r>
@@ -13952,6 +14512,9 @@
                 <a:solidFill>
                   <a:srgbClr val="FFFFFF"/>
                 </a:solidFill>
+                <a:latin typeface="BIZ UDPゴシック"/>
+                <a:ea typeface="BIZ UDPゴシック"/>
+                <a:cs typeface="BIZ UDPゴシック"/>
               </a:rPr>
               <a:t>いまここ 12/18</a:t>
             </a:r>
@@ -14101,6 +14664,9 @@
                 <a:solidFill>
                   <a:srgbClr val="0B3C6E"/>
                 </a:solidFill>
+                <a:latin typeface="BIZ UDPゴシック"/>
+                <a:ea typeface="BIZ UDPゴシック"/>
+                <a:cs typeface="BIZ UDPゴシック"/>
               </a:rPr>
               <a:t>本実験が完了し、解析と修論執筆の段階へ。提出（1/29）まで約6週間</a:t>
             </a:r>
@@ -14117,6 +14683,9 @@
                 <a:solidFill>
                   <a:srgbClr val="5A6676"/>
                 </a:solidFill>
+                <a:latin typeface="BIZ UDPゴシック"/>
+                <a:ea typeface="BIZ UDPゴシック"/>
+                <a:cs typeface="BIZ UDPゴシック"/>
               </a:rPr>
               <a:t>前回（11/27）から：介入期間の後半 → 終了 → 事後アンケート → 主要解析</a:t>
             </a:r>
@@ -14169,6 +14738,9 @@
                 <a:solidFill>
                   <a:srgbClr val="24303F"/>
                 </a:solidFill>
+                <a:latin typeface="BIZ UDPゴシック"/>
+                <a:ea typeface="BIZ UDPゴシック"/>
+                <a:cs typeface="BIZ UDPゴシック"/>
               </a:rPr>
               <a:t>参加者：最後まで続いた割合</a:t>
             </a:r>
@@ -14187,9 +14759,14 @@
         </p:nvSpPr>
         <p:spPr/>
         <p:txBody>
-          <a:bodyPr/>
-          <a:p>
-            <a:r>
+          <a:bodyPr lIns="27432" rIns="0" wrap="none"/>
+          <a:p>
+            <a:r>
+              <a:rPr sz="900">
+                <a:latin typeface="BIZ UDPゴシック"/>
+                <a:ea typeface="BIZ UDPゴシック"/>
+                <a:cs typeface="BIZ UDPゴシック"/>
+              </a:rPr>
               <a:t>2026/12/18</a:t>
             </a:r>
           </a:p>
@@ -14210,7 +14787,11 @@
           <a:bodyPr/>
           <a:p>
             <a:fld id="{B6F15528-21DE-4FAA-801E-634DDDAF4B2B}" type="slidenum">
-              <a:rPr lang="en-US"/>
+              <a:rPr lang="en-US">
+                <a:latin typeface="BIZ UDPゴシック"/>
+                <a:ea typeface="BIZ UDPゴシック"/>
+                <a:cs typeface="BIZ UDPゴシック"/>
+              </a:rPr>
               <a:t>4</a:t>
             </a:fld>
           </a:p>
@@ -14319,6 +14900,9 @@
                 <a:solidFill>
                   <a:srgbClr val="0B3C6E"/>
                 </a:solidFill>
+                <a:latin typeface="BIZ UDPゴシック"/>
+                <a:ea typeface="BIZ UDPゴシック"/>
+                <a:cs typeface="BIZ UDPゴシック"/>
               </a:rPr>
               <a:t>197名</a:t>
             </a:r>
@@ -14358,6 +14942,9 @@
                 <a:solidFill>
                   <a:srgbClr val="5A6676"/>
                 </a:solidFill>
+                <a:latin typeface="BIZ UDPゴシック"/>
+                <a:ea typeface="BIZ UDPゴシック"/>
+                <a:cs typeface="BIZ UDPゴシック"/>
               </a:rPr>
               <a:t>6週間を完了</a:t>
             </a:r>
@@ -14449,6 +15036,9 @@
                 <a:solidFill>
                   <a:srgbClr val="0B3C6E"/>
                 </a:solidFill>
+                <a:latin typeface="BIZ UDPゴシック"/>
+                <a:ea typeface="BIZ UDPゴシック"/>
+                <a:cs typeface="BIZ UDPゴシック"/>
               </a:rPr>
               <a:t>7.5%</a:t>
             </a:r>
@@ -14488,6 +15078,9 @@
                 <a:solidFill>
                   <a:srgbClr val="5A6676"/>
                 </a:solidFill>
+                <a:latin typeface="BIZ UDPゴシック"/>
+                <a:ea typeface="BIZ UDPゴシック"/>
+                <a:cs typeface="BIZ UDPゴシック"/>
               </a:rPr>
               <a:t>割付後の脱落率</a:t>
             </a:r>
@@ -14579,6 +15172,9 @@
                 <a:solidFill>
                   <a:srgbClr val="0B3C6E"/>
                 </a:solidFill>
+                <a:latin typeface="BIZ UDPゴシック"/>
+                <a:ea typeface="BIZ UDPゴシック"/>
+                <a:cs typeface="BIZ UDPゴシック"/>
               </a:rPr>
               <a:t>64名</a:t>
             </a:r>
@@ -14618,6 +15214,9 @@
                 <a:solidFill>
                   <a:srgbClr val="5A6676"/>
                 </a:solidFill>
+                <a:latin typeface="BIZ UDPゴシック"/>
+                <a:ea typeface="BIZ UDPゴシック"/>
+                <a:cs typeface="BIZ UDPゴシック"/>
               </a:rPr>
               <a:t>1群あたりの必要人数</a:t>
             </a:r>
@@ -14679,6 +15278,9 @@
                 <a:solidFill>
                   <a:srgbClr val="12A38A"/>
                 </a:solidFill>
+                <a:latin typeface="BIZ UDPゴシック"/>
+                <a:ea typeface="BIZ UDPゴシック"/>
+                <a:cs typeface="BIZ UDPゴシック"/>
               </a:rPr>
               <a:t>各群とも必要人数（64名）を確保：群A 64名・群B 66名・群C 67名。脱落は群Aでやや多い</a:t>
             </a:r>
@@ -14742,6 +15344,9 @@
                 <a:solidFill>
                   <a:srgbClr val="E8457C"/>
                 </a:solidFill>
+                <a:latin typeface="BIZ UDPゴシック"/>
+                <a:ea typeface="BIZ UDPゴシック"/>
+                <a:cs typeface="BIZ UDPゴシック"/>
               </a:rPr>
               <a:t>※ 想定値：実データで差し替え</a:t>
             </a:r>
@@ -14794,6 +15399,9 @@
                 <a:solidFill>
                   <a:srgbClr val="24303F"/>
                 </a:solidFill>
+                <a:latin typeface="BIZ UDPゴシック"/>
+                <a:ea typeface="BIZ UDPゴシック"/>
+                <a:cs typeface="BIZ UDPゴシック"/>
               </a:rPr>
               <a:t>RQ3：WHO-5（精神的な健康）の変化</a:t>
             </a:r>
@@ -14812,9 +15420,14 @@
         </p:nvSpPr>
         <p:spPr/>
         <p:txBody>
-          <a:bodyPr/>
-          <a:p>
-            <a:r>
+          <a:bodyPr lIns="27432" rIns="0" wrap="none"/>
+          <a:p>
+            <a:r>
+              <a:rPr sz="900">
+                <a:latin typeface="BIZ UDPゴシック"/>
+                <a:ea typeface="BIZ UDPゴシック"/>
+                <a:cs typeface="BIZ UDPゴシック"/>
+              </a:rPr>
               <a:t>2026/12/18</a:t>
             </a:r>
           </a:p>
@@ -14835,7 +15448,11 @@
           <a:bodyPr/>
           <a:p>
             <a:fld id="{B6F15528-21DE-4FAA-801E-634DDDAF4B2B}" type="slidenum">
-              <a:rPr lang="en-US"/>
+              <a:rPr lang="en-US">
+                <a:latin typeface="BIZ UDPゴシック"/>
+                <a:ea typeface="BIZ UDPゴシック"/>
+                <a:cs typeface="BIZ UDPゴシック"/>
+              </a:rPr>
               <a:t>5</a:t>
             </a:fld>
           </a:p>
@@ -14892,6 +15509,9 @@
                 <a:solidFill>
                   <a:srgbClr val="5A6676"/>
                 </a:solidFill>
+                <a:latin typeface="BIZ UDPゴシック"/>
+                <a:ea typeface="BIZ UDPゴシック"/>
+                <a:cs typeface="BIZ UDPゴシック"/>
               </a:rPr>
               <a:t>2週までは全群が記録のみ。2週の終わりに割付し、3週目から介入</a:t>
             </a:r>
@@ -14940,6 +15560,9 @@
                           <a:solidFill>
                             <a:srgbClr val="FFFFFF"/>
                           </a:solidFill>
+                          <a:latin typeface="BIZ UDPゴシック"/>
+                          <a:ea typeface="BIZ UDPゴシック"/>
+                          <a:cs typeface="BIZ UDPゴシック"/>
                         </a:rPr>
                         <a:t>比較</a:t>
                       </a:r>
@@ -14989,6 +15612,9 @@
                           <a:solidFill>
                             <a:srgbClr val="FFFFFF"/>
                           </a:solidFill>
+                          <a:latin typeface="BIZ UDPゴシック"/>
+                          <a:ea typeface="BIZ UDPゴシック"/>
+                          <a:cs typeface="BIZ UDPゴシック"/>
                         </a:rPr>
                         <a:t>調整済みの差</a:t>
                       </a:r>
@@ -15038,6 +15664,9 @@
                           <a:solidFill>
                             <a:srgbClr val="FFFFFF"/>
                           </a:solidFill>
+                          <a:latin typeface="BIZ UDPゴシック"/>
+                          <a:ea typeface="BIZ UDPゴシック"/>
+                          <a:cs typeface="BIZ UDPゴシック"/>
                         </a:rPr>
                         <a:t>p（Holm 補正後）</a:t>
                       </a:r>
@@ -15089,6 +15718,9 @@
                           <a:solidFill>
                             <a:srgbClr val="24303F"/>
                           </a:solidFill>
+                          <a:latin typeface="BIZ UDPゴシック"/>
+                          <a:ea typeface="BIZ UDPゴシック"/>
+                          <a:cs typeface="BIZ UDPゴシック"/>
                         </a:rPr>
                         <a:t>C − B（主要）</a:t>
                       </a:r>
@@ -15138,6 +15770,9 @@
                           <a:solidFill>
                             <a:srgbClr val="24303F"/>
                           </a:solidFill>
+                          <a:latin typeface="BIZ UDPゴシック"/>
+                          <a:ea typeface="BIZ UDPゴシック"/>
+                          <a:cs typeface="BIZ UDPゴシック"/>
                         </a:rPr>
                         <a:t>+0.9</a:t>
                       </a:r>
@@ -15187,6 +15822,9 @@
                           <a:solidFill>
                             <a:srgbClr val="24303F"/>
                           </a:solidFill>
+                          <a:latin typeface="BIZ UDPゴシック"/>
+                          <a:ea typeface="BIZ UDPゴシック"/>
+                          <a:cs typeface="BIZ UDPゴシック"/>
                         </a:rPr>
                         <a:t>.08（.16）</a:t>
                       </a:r>
@@ -15238,6 +15876,9 @@
                           <a:solidFill>
                             <a:srgbClr val="24303F"/>
                           </a:solidFill>
+                          <a:latin typeface="BIZ UDPゴシック"/>
+                          <a:ea typeface="BIZ UDPゴシック"/>
+                          <a:cs typeface="BIZ UDPゴシック"/>
                         </a:rPr>
                         <a:t>B − A（主要）</a:t>
                       </a:r>
@@ -15287,6 +15928,9 @@
                           <a:solidFill>
                             <a:srgbClr val="24303F"/>
                           </a:solidFill>
+                          <a:latin typeface="BIZ UDPゴシック"/>
+                          <a:ea typeface="BIZ UDPゴシック"/>
+                          <a:cs typeface="BIZ UDPゴシック"/>
                         </a:rPr>
                         <a:t>+0.8</a:t>
                       </a:r>
@@ -15336,6 +15980,9 @@
                           <a:solidFill>
                             <a:srgbClr val="24303F"/>
                           </a:solidFill>
+                          <a:latin typeface="BIZ UDPゴシック"/>
+                          <a:ea typeface="BIZ UDPゴシック"/>
+                          <a:cs typeface="BIZ UDPゴシック"/>
                         </a:rPr>
                         <a:t>.12（.16）</a:t>
                       </a:r>
@@ -15387,6 +16034,9 @@
                           <a:solidFill>
                             <a:srgbClr val="24303F"/>
                           </a:solidFill>
+                          <a:latin typeface="BIZ UDPゴシック"/>
+                          <a:ea typeface="BIZ UDPゴシック"/>
+                          <a:cs typeface="BIZ UDPゴシック"/>
                         </a:rPr>
                         <a:t>C − A（探索的）</a:t>
                       </a:r>
@@ -15436,6 +16086,9 @@
                           <a:solidFill>
                             <a:srgbClr val="24303F"/>
                           </a:solidFill>
+                          <a:latin typeface="BIZ UDPゴシック"/>
+                          <a:ea typeface="BIZ UDPゴシック"/>
+                          <a:cs typeface="BIZ UDPゴシック"/>
                         </a:rPr>
                         <a:t>+1.7</a:t>
                       </a:r>
@@ -15485,6 +16138,9 @@
                           <a:solidFill>
                             <a:srgbClr val="24303F"/>
                           </a:solidFill>
+                          <a:latin typeface="BIZ UDPゴシック"/>
+                          <a:ea typeface="BIZ UDPゴシック"/>
+                          <a:cs typeface="BIZ UDPゴシック"/>
                         </a:rPr>
                         <a:t>.001</a:t>
                       </a:r>
@@ -15554,6 +16210,9 @@
                 <a:solidFill>
                   <a:srgbClr val="5A6676"/>
                 </a:solidFill>
+                <a:latin typeface="BIZ UDPゴシック"/>
+                <a:ea typeface="BIZ UDPゴシック"/>
+                <a:cs typeface="BIZ UDPゴシック"/>
               </a:rPr>
               <a:t>共分散分析（2週の WHO-5 を共変量）</a:t>
             </a:r>
@@ -15637,6 +16296,9 @@
                 <a:solidFill>
                   <a:srgbClr val="E07A10"/>
                 </a:solidFill>
+                <a:latin typeface="BIZ UDPゴシック"/>
+                <a:ea typeface="BIZ UDPゴシック"/>
+                <a:cs typeface="BIZ UDPゴシック"/>
               </a:rPr>
               <a:t>主要な比較は有意差なし</a:t>
             </a:r>
@@ -15649,7 +16311,7 @@
               <a:buClr>
                 <a:srgbClr val="E07A10"/>
               </a:buClr>
-              <a:buFont typeface="Arial"/>
+              <a:buFont typeface="BIZ UDPゴシック"/>
               <a:buChar char="•"/>
             </a:pPr>
             <a:r>
@@ -15657,6 +16319,9 @@
                 <a:solidFill>
                   <a:srgbClr val="24303F"/>
                 </a:solidFill>
+                <a:latin typeface="BIZ UDPゴシック"/>
+                <a:ea typeface="BIZ UDPゴシック"/>
+                <a:cs typeface="BIZ UDPゴシック"/>
               </a:rPr>
               <a:t>群Cは記録のみの群Aより +1.7 点（探索的）</a:t>
             </a:r>
@@ -15669,7 +16334,7 @@
               <a:buClr>
                 <a:srgbClr val="E07A10"/>
               </a:buClr>
-              <a:buFont typeface="Arial"/>
+              <a:buFont typeface="BIZ UDPゴシック"/>
               <a:buChar char="•"/>
             </a:pPr>
             <a:r>
@@ -15677,6 +16342,9 @@
                 <a:solidFill>
                   <a:srgbClr val="24303F"/>
                 </a:solidFill>
+                <a:latin typeface="BIZ UDPゴシック"/>
+                <a:ea typeface="BIZ UDPゴシック"/>
+                <a:cs typeface="BIZ UDPゴシック"/>
               </a:rPr>
               <a:t>群C−群B の差 +0.9 は効果量 d ≈ 0.2（小）。検出力が足りなかった可能性</a:t>
             </a:r>
@@ -15740,6 +16408,9 @@
                 <a:solidFill>
                   <a:srgbClr val="E8457C"/>
                 </a:solidFill>
+                <a:latin typeface="BIZ UDPゴシック"/>
+                <a:ea typeface="BIZ UDPゴシック"/>
+                <a:cs typeface="BIZ UDPゴシック"/>
               </a:rPr>
               <a:t>※ 想定値：実データで差し替え</a:t>
             </a:r>
@@ -15792,6 +16463,9 @@
                 <a:solidFill>
                   <a:srgbClr val="24303F"/>
                 </a:solidFill>
+                <a:latin typeface="BIZ UDPゴシック"/>
+                <a:ea typeface="BIZ UDPゴシック"/>
+                <a:cs typeface="BIZ UDPゴシック"/>
               </a:rPr>
               <a:t>RQ2：選んだ提案を実行できた割合</a:t>
             </a:r>
@@ -15810,9 +16484,14 @@
         </p:nvSpPr>
         <p:spPr/>
         <p:txBody>
-          <a:bodyPr/>
-          <a:p>
-            <a:r>
+          <a:bodyPr lIns="27432" rIns="0" wrap="none"/>
+          <a:p>
+            <a:r>
+              <a:rPr sz="900">
+                <a:latin typeface="BIZ UDPゴシック"/>
+                <a:ea typeface="BIZ UDPゴシック"/>
+                <a:cs typeface="BIZ UDPゴシック"/>
+              </a:rPr>
               <a:t>2026/12/18</a:t>
             </a:r>
           </a:p>
@@ -15833,7 +16512,11 @@
           <a:bodyPr/>
           <a:p>
             <a:fld id="{B6F15528-21DE-4FAA-801E-634DDDAF4B2B}" type="slidenum">
-              <a:rPr lang="en-US"/>
+              <a:rPr lang="en-US">
+                <a:latin typeface="BIZ UDPゴシック"/>
+                <a:ea typeface="BIZ UDPゴシック"/>
+                <a:cs typeface="BIZ UDPゴシック"/>
+              </a:rPr>
               <a:t>6</a:t>
             </a:fld>
           </a:p>
@@ -15934,6 +16617,9 @@
                 <a:solidFill>
                   <a:srgbClr val="12A38A"/>
                 </a:solidFill>
+                <a:latin typeface="BIZ UDPゴシック"/>
+                <a:ea typeface="BIZ UDPゴシック"/>
+                <a:cs typeface="BIZ UDPゴシック"/>
               </a:rPr>
               <a:t>オッズ比 1.71</a:t>
             </a:r>
@@ -15950,6 +16636,9 @@
                 <a:solidFill>
                   <a:srgbClr val="24303F"/>
                 </a:solidFill>
+                <a:latin typeface="BIZ UDPゴシック"/>
+                <a:ea typeface="BIZ UDPゴシック"/>
+                <a:cs typeface="BIZ UDPゴシック"/>
               </a:rPr>
               <a:t>95%信頼区間 1.18〜2.48、p = .005</a:t>
             </a:r>
@@ -15966,6 +16655,9 @@
                 <a:solidFill>
                   <a:srgbClr val="5A6676"/>
                 </a:solidFill>
+                <a:latin typeface="BIZ UDPゴシック"/>
+                <a:ea typeface="BIZ UDPゴシック"/>
+                <a:cs typeface="BIZ UDPゴシック"/>
               </a:rPr>
               <a:t>ロジスティック混合モデル（群×週）</a:t>
             </a:r>
@@ -16123,6 +16815,9 @@
                 <a:solidFill>
                   <a:srgbClr val="0B3C6E"/>
                 </a:solidFill>
+                <a:latin typeface="BIZ UDPゴシック"/>
+                <a:ea typeface="BIZ UDPゴシック"/>
+                <a:cs typeface="BIZ UDPゴシック"/>
               </a:rPr>
               <a:t>読み取れること</a:t>
             </a:r>
@@ -16158,7 +16853,7 @@
               <a:buClr>
                 <a:srgbClr val="0099FF"/>
               </a:buClr>
-              <a:buFont typeface="Arial"/>
+              <a:buFont typeface="BIZ UDPゴシック"/>
               <a:buChar char="•"/>
             </a:pPr>
             <a:r>
@@ -16166,6 +16861,9 @@
                 <a:solidFill>
                   <a:srgbClr val="24303F"/>
                 </a:solidFill>
+                <a:latin typeface="BIZ UDPゴシック"/>
+                <a:ea typeface="BIZ UDPゴシック"/>
+                <a:cs typeface="BIZ UDPゴシック"/>
               </a:rPr>
               <a:t>両群とも週を追うごとに下がる（交互作用は有意でない）</a:t>
             </a:r>
@@ -16178,7 +16876,7 @@
               <a:buClr>
                 <a:srgbClr val="0099FF"/>
               </a:buClr>
-              <a:buFont typeface="Arial"/>
+              <a:buFont typeface="BIZ UDPゴシック"/>
               <a:buChar char="•"/>
             </a:pPr>
             <a:r>
@@ -16186,6 +16884,9 @@
                 <a:solidFill>
                   <a:srgbClr val="24303F"/>
                 </a:solidFill>
+                <a:latin typeface="BIZ UDPゴシック"/>
+                <a:ea typeface="BIZ UDPゴシック"/>
+                <a:cs typeface="BIZ UDPゴシック"/>
               </a:rPr>
               <a:t>群Cは下がり方がゆるやかで、6週でも半分以上が実行</a:t>
             </a:r>
@@ -16198,7 +16899,7 @@
               <a:buClr>
                 <a:srgbClr val="E8457C"/>
               </a:buClr>
-              <a:buFont typeface="Arial"/>
+              <a:buFont typeface="BIZ UDPゴシック"/>
               <a:buChar char="•"/>
             </a:pPr>
             <a:r>
@@ -16206,6 +16907,9 @@
                 <a:solidFill>
                   <a:srgbClr val="24303F"/>
                 </a:solidFill>
+                <a:latin typeface="BIZ UDPゴシック"/>
+                <a:ea typeface="BIZ UDPゴシック"/>
+                <a:cs typeface="BIZ UDPゴシック"/>
               </a:rPr>
               <a:t>同じ提案でも、見せ方で実行が変わる</a:t>
             </a:r>
@@ -16269,6 +16973,9 @@
                 <a:solidFill>
                   <a:srgbClr val="E8457C"/>
                 </a:solidFill>
+                <a:latin typeface="BIZ UDPゴシック"/>
+                <a:ea typeface="BIZ UDPゴシック"/>
+                <a:cs typeface="BIZ UDPゴシック"/>
               </a:rPr>
               <a:t>※ 想定値：実データで差し替え</a:t>
             </a:r>
@@ -16321,6 +17028,9 @@
                 <a:solidFill>
                   <a:srgbClr val="24303F"/>
                 </a:solidFill>
+                <a:latin typeface="BIZ UDPゴシック"/>
+                <a:ea typeface="BIZ UDPゴシック"/>
+                <a:cs typeface="BIZ UDPゴシック"/>
               </a:rPr>
               <a:t>RQ1：個人補正で予測はどれだけ当たったか</a:t>
             </a:r>
@@ -16339,9 +17049,14 @@
         </p:nvSpPr>
         <p:spPr/>
         <p:txBody>
-          <a:bodyPr/>
-          <a:p>
-            <a:r>
+          <a:bodyPr lIns="27432" rIns="0" wrap="none"/>
+          <a:p>
+            <a:r>
+              <a:rPr sz="900">
+                <a:latin typeface="BIZ UDPゴシック"/>
+                <a:ea typeface="BIZ UDPゴシック"/>
+                <a:cs typeface="BIZ UDPゴシック"/>
+              </a:rPr>
               <a:t>2026/12/18</a:t>
             </a:r>
           </a:p>
@@ -16362,7 +17077,11 @@
           <a:bodyPr/>
           <a:p>
             <a:fld id="{B6F15528-21DE-4FAA-801E-634DDDAF4B2B}" type="slidenum">
-              <a:rPr lang="en-US"/>
+              <a:rPr lang="en-US">
+                <a:latin typeface="BIZ UDPゴシック"/>
+                <a:ea typeface="BIZ UDPゴシック"/>
+                <a:cs typeface="BIZ UDPゴシック"/>
+              </a:rPr>
               <a:t>7</a:t>
             </a:fld>
           </a:p>
@@ -16471,6 +17190,9 @@
                 <a:solidFill>
                   <a:srgbClr val="0B3C6E"/>
                 </a:solidFill>
+                <a:latin typeface="BIZ UDPゴシック"/>
+                <a:ea typeface="BIZ UDPゴシック"/>
+                <a:cs typeface="BIZ UDPゴシック"/>
               </a:rPr>
               <a:t>78%</a:t>
             </a:r>
@@ -16510,6 +17232,9 @@
                 <a:solidFill>
                   <a:srgbClr val="5A6676"/>
                 </a:solidFill>
+                <a:latin typeface="BIZ UDPゴシック"/>
+                <a:ea typeface="BIZ UDPゴシック"/>
+                <a:cs typeface="BIZ UDPゴシック"/>
               </a:rPr>
               <a:t>充実：80%区間に入った割合</a:t>
             </a:r>
@@ -16601,6 +17326,9 @@
                 <a:solidFill>
                   <a:srgbClr val="0B3C6E"/>
                 </a:solidFill>
+                <a:latin typeface="BIZ UDPゴシック"/>
+                <a:ea typeface="BIZ UDPゴシック"/>
+                <a:cs typeface="BIZ UDPゴシック"/>
               </a:rPr>
               <a:t>76%</a:t>
             </a:r>
@@ -16640,6 +17368,9 @@
                 <a:solidFill>
                   <a:srgbClr val="5A6676"/>
                 </a:solidFill>
+                <a:latin typeface="BIZ UDPゴシック"/>
+                <a:ea typeface="BIZ UDPゴシック"/>
+                <a:cs typeface="BIZ UDPゴシック"/>
               </a:rPr>
               <a:t>推し疲れ：80%区間に入った割合</a:t>
             </a:r>
@@ -16723,6 +17454,9 @@
                 <a:solidFill>
                   <a:srgbClr val="0B3C6E"/>
                 </a:solidFill>
+                <a:latin typeface="BIZ UDPゴシック"/>
+                <a:ea typeface="BIZ UDPゴシック"/>
+                <a:cs typeface="BIZ UDPゴシック"/>
               </a:rPr>
               <a:t>区間はほぼ「正直」</a:t>
             </a:r>
@@ -16739,6 +17473,9 @@
                 <a:solidFill>
                   <a:srgbClr val="24303F"/>
                 </a:solidFill>
+                <a:latin typeface="BIZ UDPゴシック"/>
+                <a:ea typeface="BIZ UDPゴシック"/>
+                <a:cs typeface="BIZ UDPゴシック"/>
               </a:rPr>
               <a:t>80%区間に入った割合が80%に近い → ゆらぎアバターが示す幅は、実際の外れ方とおおむね一致</a:t>
             </a:r>
@@ -16802,6 +17539,9 @@
                 <a:solidFill>
                   <a:srgbClr val="E8457C"/>
                 </a:solidFill>
+                <a:latin typeface="BIZ UDPゴシック"/>
+                <a:ea typeface="BIZ UDPゴシック"/>
+                <a:cs typeface="BIZ UDPゴシック"/>
               </a:rPr>
               <a:t>※ 想定値：実データで差し替え</a:t>
             </a:r>
@@ -16854,6 +17594,9 @@
                 <a:solidFill>
                   <a:srgbClr val="24303F"/>
                 </a:solidFill>
+                <a:latin typeface="BIZ UDPゴシック"/>
+                <a:ea typeface="BIZ UDPゴシック"/>
+                <a:cs typeface="BIZ UDPゴシック"/>
               </a:rPr>
               <a:t>副次評価：疲れの中身と楽しさ</a:t>
             </a:r>
@@ -16872,9 +17615,14 @@
         </p:nvSpPr>
         <p:spPr/>
         <p:txBody>
-          <a:bodyPr/>
-          <a:p>
-            <a:r>
+          <a:bodyPr lIns="27432" rIns="0" wrap="none"/>
+          <a:p>
+            <a:r>
+              <a:rPr sz="900">
+                <a:latin typeface="BIZ UDPゴシック"/>
+                <a:ea typeface="BIZ UDPゴシック"/>
+                <a:cs typeface="BIZ UDPゴシック"/>
+              </a:rPr>
               <a:t>2026/12/18</a:t>
             </a:r>
           </a:p>
@@ -16895,7 +17643,11 @@
           <a:bodyPr/>
           <a:p>
             <a:fld id="{B6F15528-21DE-4FAA-801E-634DDDAF4B2B}" type="slidenum">
-              <a:rPr lang="en-US"/>
+              <a:rPr lang="en-US">
+                <a:latin typeface="BIZ UDPゴシック"/>
+                <a:ea typeface="BIZ UDPゴシック"/>
+                <a:cs typeface="BIZ UDPゴシック"/>
+              </a:rPr>
               <a:t>8</a:t>
             </a:fld>
           </a:p>
@@ -16952,6 +17704,9 @@
                 <a:solidFill>
                   <a:srgbClr val="24303F"/>
                 </a:solidFill>
+                <a:latin typeface="BIZ UDPゴシック"/>
+                <a:ea typeface="BIZ UDPゴシック"/>
+                <a:cs typeface="BIZ UDPゴシック"/>
               </a:rPr>
               <a:t>睡眠と出費の疲れが群Cで大きく減った。比較（SNS での他のファンとの比較）はどの群も変わらない</a:t>
             </a:r>
@@ -17035,6 +17790,9 @@
                 <a:solidFill>
                   <a:srgbClr val="12A38A"/>
                 </a:solidFill>
+                <a:latin typeface="BIZ UDPゴシック"/>
+                <a:ea typeface="BIZ UDPゴシック"/>
+                <a:cs typeface="BIZ UDPゴシック"/>
               </a:rPr>
               <a:t>楽しさは下がらなかった</a:t>
             </a:r>
@@ -17051,6 +17809,9 @@
                 <a:solidFill>
                   <a:srgbClr val="24303F"/>
                 </a:solidFill>
+                <a:latin typeface="BIZ UDPゴシック"/>
+                <a:ea typeface="BIZ UDPゴシック"/>
+                <a:cs typeface="BIZ UDPゴシック"/>
               </a:rPr>
               <a:t>群A 3.9 → 3.9</a:t>
             </a:r>
@@ -17067,6 +17828,9 @@
                 <a:solidFill>
                   <a:srgbClr val="24303F"/>
                 </a:solidFill>
+                <a:latin typeface="BIZ UDPゴシック"/>
+                <a:ea typeface="BIZ UDPゴシック"/>
+                <a:cs typeface="BIZ UDPゴシック"/>
               </a:rPr>
               <a:t>群B 3.9 → 3.9</a:t>
             </a:r>
@@ -17083,6 +17847,9 @@
                 <a:solidFill>
                   <a:srgbClr val="12A38A"/>
                 </a:solidFill>
+                <a:latin typeface="BIZ UDPゴシック"/>
+                <a:ea typeface="BIZ UDPゴシック"/>
+                <a:cs typeface="BIZ UDPゴシック"/>
               </a:rPr>
               <a:t>群C 3.8 → 3.9</a:t>
             </a:r>
@@ -17166,6 +17933,9 @@
                 <a:solidFill>
                   <a:srgbClr val="0B3C6E"/>
                 </a:solidFill>
+                <a:latin typeface="BIZ UDPゴシック"/>
+                <a:ea typeface="BIZ UDPゴシック"/>
+                <a:cs typeface="BIZ UDPゴシック"/>
               </a:rPr>
               <a:t>「組み替える」提案の手応え</a:t>
             </a:r>
@@ -17182,6 +17952,9 @@
                 <a:solidFill>
                   <a:srgbClr val="24303F"/>
                 </a:solidFill>
+                <a:latin typeface="BIZ UDPゴシック"/>
+                <a:ea typeface="BIZ UDPゴシック"/>
+                <a:cs typeface="BIZ UDPゴシック"/>
               </a:rPr>
               <a:t>疲れは減り、楽しさは保たれた。一律に減らす支援では得にくい結果</a:t>
             </a:r>
@@ -17245,6 +18018,9 @@
                 <a:solidFill>
                   <a:srgbClr val="E8457C"/>
                 </a:solidFill>
+                <a:latin typeface="BIZ UDPゴシック"/>
+                <a:ea typeface="BIZ UDPゴシック"/>
+                <a:cs typeface="BIZ UDPゴシック"/>
               </a:rPr>
               <a:t>※ 想定値：実データで差し替え</a:t>
             </a:r>
@@ -17297,6 +18073,9 @@
                 <a:solidFill>
                   <a:srgbClr val="24303F"/>
                 </a:solidFill>
+                <a:latin typeface="BIZ UDPゴシック"/>
+                <a:ea typeface="BIZ UDPゴシック"/>
+                <a:cs typeface="BIZ UDPゴシック"/>
               </a:rPr>
               <a:t>記録の続き方とアバターの評価</a:t>
             </a:r>
@@ -17315,9 +18094,14 @@
         </p:nvSpPr>
         <p:spPr/>
         <p:txBody>
-          <a:bodyPr/>
-          <a:p>
-            <a:r>
+          <a:bodyPr lIns="27432" rIns="0" wrap="none"/>
+          <a:p>
+            <a:r>
+              <a:rPr sz="900">
+                <a:latin typeface="BIZ UDPゴシック"/>
+                <a:ea typeface="BIZ UDPゴシック"/>
+                <a:cs typeface="BIZ UDPゴシック"/>
+              </a:rPr>
               <a:t>2026/12/18</a:t>
             </a:r>
           </a:p>
@@ -17338,7 +18122,11 @@
           <a:bodyPr/>
           <a:p>
             <a:fld id="{B6F15528-21DE-4FAA-801E-634DDDAF4B2B}" type="slidenum">
-              <a:rPr lang="en-US"/>
+              <a:rPr lang="en-US">
+                <a:latin typeface="BIZ UDPゴシック"/>
+                <a:ea typeface="BIZ UDPゴシック"/>
+                <a:cs typeface="BIZ UDPゴシック"/>
+              </a:rPr>
               <a:t>9</a:t>
             </a:fld>
           </a:p>
@@ -17395,6 +18183,9 @@
                 <a:solidFill>
                   <a:srgbClr val="5A6676"/>
                 </a:solidFill>
+                <a:latin typeface="BIZ UDPゴシック"/>
+                <a:ea typeface="BIZ UDPゴシック"/>
+                <a:cs typeface="BIZ UDPゴシック"/>
               </a:rPr>
               <a:t>3週目（介入開始）から差が開く。群Cは「未来の解像度」が記録の動機になった可能性（探索的）</a:t>
             </a:r>
@@ -17486,6 +18277,9 @@
                 <a:solidFill>
                   <a:srgbClr val="12A38A"/>
                 </a:solidFill>
+                <a:latin typeface="BIZ UDPゴシック"/>
+                <a:ea typeface="BIZ UDPゴシック"/>
+                <a:cs typeface="BIZ UDPゴシック"/>
               </a:rPr>
               <a:t>3.7</a:t>
             </a:r>
@@ -17525,6 +18319,9 @@
                 <a:solidFill>
                   <a:srgbClr val="5A6676"/>
                 </a:solidFill>
+                <a:latin typeface="BIZ UDPゴシック"/>
+                <a:ea typeface="BIZ UDPゴシック"/>
+                <a:cs typeface="BIZ UDPゴシック"/>
               </a:rPr>
               <a:t>似ている度（群C・5段階）</a:t>
             </a:r>
@@ -17616,6 +18413,9 @@
                 <a:solidFill>
                   <a:srgbClr val="12A38A"/>
                 </a:solidFill>
+                <a:latin typeface="BIZ UDPゴシック"/>
+                <a:ea typeface="BIZ UDPゴシック"/>
+                <a:cs typeface="BIZ UDPゴシック"/>
               </a:rPr>
               <a:t>4.6 vs 4.1</a:t>
             </a:r>
@@ -17655,6 +18455,9 @@
                 <a:solidFill>
                   <a:srgbClr val="5A6676"/>
                 </a:solidFill>
+                <a:latin typeface="BIZ UDPゴシック"/>
+                <a:ea typeface="BIZ UDPゴシック"/>
+                <a:cs typeface="BIZ UDPゴシック"/>
               </a:rPr>
               <a:t>未来の自分とのつながり（C vs B・7段階）</a:t>
             </a:r>
@@ -17746,6 +18549,9 @@
                 <a:solidFill>
                   <a:srgbClr val="0B3C6E"/>
                 </a:solidFill>
+                <a:latin typeface="BIZ UDPゴシック"/>
+                <a:ea typeface="BIZ UDPゴシック"/>
+                <a:cs typeface="BIZ UDPゴシック"/>
               </a:rPr>
               <a:t>1.9 vs 1.8</a:t>
             </a:r>
@@ -17785,6 +18591,9 @@
                 <a:solidFill>
                   <a:srgbClr val="5A6676"/>
                 </a:solidFill>
+                <a:latin typeface="BIZ UDPゴシック"/>
+                <a:ea typeface="BIZ UDPゴシック"/>
+                <a:cs typeface="BIZ UDPゴシック"/>
               </a:rPr>
               <a:t>予測を見た後の不安（C vs B・5段階）</a:t>
             </a:r>
@@ -17876,6 +18685,9 @@
                 <a:solidFill>
                   <a:srgbClr val="12A38A"/>
                 </a:solidFill>
+                <a:latin typeface="BIZ UDPゴシック"/>
+                <a:ea typeface="BIZ UDPゴシック"/>
+                <a:cs typeface="BIZ UDPゴシック"/>
               </a:rPr>
               <a:t>76.4</a:t>
             </a:r>
@@ -17915,6 +18727,9 @@
                 <a:solidFill>
                   <a:srgbClr val="5A6676"/>
                 </a:solidFill>
+                <a:latin typeface="BIZ UDPゴシック"/>
+                <a:ea typeface="BIZ UDPゴシック"/>
+                <a:cs typeface="BIZ UDPゴシック"/>
               </a:rPr>
               <a:t>SUS（群C）</a:t>
             </a:r>
@@ -17978,6 +18793,9 @@
                 <a:solidFill>
                   <a:srgbClr val="E8457C"/>
                 </a:solidFill>
+                <a:latin typeface="BIZ UDPゴシック"/>
+                <a:ea typeface="BIZ UDPゴシック"/>
+                <a:cs typeface="BIZ UDPゴシック"/>
               </a:rPr>
               <a:t>※ 想定値：実データで差し替え</a:t>
             </a:r>
@@ -18035,12 +18853,12 @@
     </a:clrScheme>
     <a:fontScheme name="mixlab">
       <a:majorFont>
-        <a:latin typeface="Arial"/>
+        <a:latin typeface="BIZ UDPゴシック"/>
         <a:ea typeface="BIZ UDPゴシック"/>
         <a:cs typeface=""/>
       </a:majorFont>
       <a:minorFont>
-        <a:latin typeface="Arial"/>
+        <a:latin typeface="BIZ UDPゴシック"/>
         <a:ea typeface="BIZ UDPゴシック"/>
         <a:cs typeface=""/>
       </a:minorFont>
@@ -18236,7 +19054,7 @@
     </a:clrScheme>
     <a:fontScheme name="Office">
       <a:majorFont>
-        <a:latin typeface="游ゴシック Light" panose="020F0302020204030204"/>
+        <a:latin typeface="BIZ UDPゴシック"/>
         <a:ea typeface=""/>
         <a:cs typeface=""/>
         <a:font script="Jpan" typeface="游ゴシック Light"/>
@@ -18271,7 +19089,7 @@
         <a:font script="Geor" typeface="Sylfaen"/>
       </a:majorFont>
       <a:minorFont>
-        <a:latin typeface="游ゴシック" panose="020F0502020204030204"/>
+        <a:latin typeface="BIZ UDPゴシック"/>
         <a:ea typeface=""/>
         <a:cs typeface=""/>
         <a:font script="Jpan" typeface="游ゴシック"/>
